--- a/docs/이거먼저-발표.pptx
+++ b/docs/이거먼저-발표.pptx
@@ -1747,7 +1747,7 @@
     <p:bg>
       <p:bgPr>
         <a:solidFill>
-          <a:srgbClr val="004E36"/>
+          <a:srgbClr val="16261A"/>
         </a:solidFill>
       </p:bgPr>
     </p:bg>
@@ -1792,7 +1792,7 @@
             <a:r>
               <a:rPr lang="en-US" sz="1050" b="1" spc="400" kern="0" dirty="0">
                 <a:solidFill>
-                  <a:srgbClr val="9FC3B4"/>
+                  <a:srgbClr val="5BD41E"/>
                 </a:solidFill>
                 <a:latin typeface="Malgun Gothic" pitchFamily="34" charset="0"/>
                 <a:ea typeface="Malgun Gothic" pitchFamily="34" charset="-122"/>
@@ -1812,7 +1812,7 @@
         </p:nvSpPr>
         <p:spPr>
           <a:xfrm>
-            <a:off x="548640" y="1691640"/>
+            <a:off x="548640" y="1645920"/>
             <a:ext cx="8046720" cy="914400"/>
           </a:xfrm>
           <a:prstGeom prst="rect">
@@ -1845,13 +1845,33 @@
       </p:sp>
       <p:sp>
         <p:nvSpPr>
-          <p:cNvPr id="4" name="Text 2"/>
-          <p:cNvSpPr/>
-          <p:nvPr/>
-        </p:nvSpPr>
-        <p:spPr>
-          <a:xfrm>
-            <a:off x="548640" y="2697480"/>
+          <p:cNvPr id="4" name="Shape 2"/>
+          <p:cNvSpPr/>
+          <p:nvPr/>
+        </p:nvSpPr>
+        <p:spPr>
+          <a:xfrm>
+            <a:off x="585216" y="2542032"/>
+            <a:ext cx="2194560" cy="155448"/>
+          </a:xfrm>
+          <a:prstGeom prst="rect">
+            <a:avLst/>
+          </a:prstGeom>
+          <a:solidFill>
+            <a:srgbClr val="5BD41E"/>
+          </a:solidFill>
+          <a:ln/>
+        </p:spPr>
+      </p:sp>
+      <p:sp>
+        <p:nvSpPr>
+          <p:cNvPr id="5" name="Text 3"/>
+          <p:cNvSpPr/>
+          <p:nvPr/>
+        </p:nvSpPr>
+        <p:spPr>
+          <a:xfrm>
+            <a:off x="548640" y="2788920"/>
             <a:ext cx="8046720" cy="457200"/>
           </a:xfrm>
           <a:prstGeom prst="rect">
@@ -1870,7 +1890,7 @@
             <a:r>
               <a:rPr lang="en-US" sz="1800" dirty="0">
                 <a:solidFill>
-                  <a:srgbClr val="CFE3DA"/>
+                  <a:srgbClr val="D8E8CE"/>
                 </a:solidFill>
                 <a:latin typeface="Malgun Gothic" pitchFamily="34" charset="0"/>
                 <a:ea typeface="Malgun Gothic" pitchFamily="34" charset="-122"/>
@@ -1884,7 +1904,7 @@
       </p:sp>
       <p:sp>
         <p:nvSpPr>
-          <p:cNvPr id="5" name="Text 3"/>
+          <p:cNvPr id="6" name="Text 4"/>
           <p:cNvSpPr/>
           <p:nvPr/>
         </p:nvSpPr>
@@ -1909,7 +1929,7 @@
             <a:r>
               <a:rPr lang="en-US" sz="1200" dirty="0">
                 <a:solidFill>
-                  <a:srgbClr val="9FC3B4"/>
+                  <a:srgbClr val="8FA085"/>
                 </a:solidFill>
                 <a:latin typeface="Malgun Gothic" pitchFamily="34" charset="0"/>
                 <a:ea typeface="Malgun Gothic" pitchFamily="34" charset="-122"/>
@@ -1923,7 +1943,7 @@
       </p:sp>
       <p:sp>
         <p:nvSpPr>
-          <p:cNvPr id="6" name="Text 4"/>
+          <p:cNvPr id="7" name="Text 5"/>
           <p:cNvSpPr/>
           <p:nvPr/>
         </p:nvSpPr>
@@ -1948,7 +1968,7 @@
             <a:r>
               <a:rPr lang="en-US" sz="1200" dirty="0">
                 <a:solidFill>
-                  <a:srgbClr val="9FC3B4"/>
+                  <a:srgbClr val="8FA085"/>
                 </a:solidFill>
                 <a:latin typeface="Malgun Gothic" pitchFamily="34" charset="0"/>
                 <a:ea typeface="Malgun Gothic" pitchFamily="34" charset="-122"/>
@@ -1974,7 +1994,7 @@
     <p:bg>
       <p:bgPr>
         <a:solidFill>
-          <a:srgbClr val="FFFFFF"/>
+          <a:srgbClr val="FCFEF9"/>
         </a:solidFill>
       </p:bgPr>
     </p:bg>
@@ -2019,7 +2039,7 @@
             <a:r>
               <a:rPr lang="en-US" sz="1100" b="1" spc="300" kern="0" dirty="0">
                 <a:solidFill>
-                  <a:srgbClr val="004E36"/>
+                  <a:srgbClr val="2F9E14"/>
                 </a:solidFill>
                 <a:latin typeface="Malgun Gothic" pitchFamily="34" charset="0"/>
                 <a:ea typeface="Malgun Gothic" pitchFamily="34" charset="-122"/>
@@ -2058,7 +2078,7 @@
             <a:r>
               <a:rPr lang="en-US" sz="2700" b="1" dirty="0">
                 <a:solidFill>
-                  <a:srgbClr val="2E2D2B"/>
+                  <a:srgbClr val="17251C"/>
                 </a:solidFill>
                 <a:latin typeface="Malgun Gothic" pitchFamily="34" charset="0"/>
                 <a:ea typeface="Malgun Gothic" pitchFamily="34" charset="-122"/>
@@ -2081,15 +2101,17 @@
             <a:off x="548640" y="1691640"/>
             <a:ext cx="2514600" cy="2103120"/>
           </a:xfrm>
-          <a:prstGeom prst="rect">
-            <a:avLst/>
+          <a:prstGeom prst="roundRect">
+            <a:avLst>
+              <a:gd name="adj" fmla="val 4348"/>
+            </a:avLst>
           </a:prstGeom>
           <a:solidFill>
-            <a:srgbClr val="F8F7F5"/>
+            <a:srgbClr val="FFFFFF"/>
           </a:solidFill>
           <a:ln w="12700">
             <a:solidFill>
-              <a:srgbClr val="D9D7D3"/>
+              <a:srgbClr val="E3ECDA"/>
             </a:solidFill>
             <a:prstDash val="solid"/>
           </a:ln>
@@ -2122,7 +2144,7 @@
             <a:r>
               <a:rPr lang="en-US" sz="1650" b="1" dirty="0">
                 <a:solidFill>
-                  <a:srgbClr val="004E36"/>
+                  <a:srgbClr val="2F9E14"/>
                 </a:solidFill>
                 <a:latin typeface="Malgun Gothic" pitchFamily="34" charset="0"/>
                 <a:ea typeface="Malgun Gothic" pitchFamily="34" charset="-122"/>
@@ -2161,7 +2183,7 @@
             <a:r>
               <a:rPr lang="en-US" sz="1250" dirty="0">
                 <a:solidFill>
-                  <a:srgbClr val="2E2D2B"/>
+                  <a:srgbClr val="17251C"/>
                 </a:solidFill>
                 <a:latin typeface="Malgun Gothic" pitchFamily="34" charset="0"/>
                 <a:ea typeface="Malgun Gothic" pitchFamily="34" charset="-122"/>
@@ -2178,7 +2200,7 @@
             <a:r>
               <a:rPr lang="en-US" sz="1250" dirty="0">
                 <a:solidFill>
-                  <a:srgbClr val="2E2D2B"/>
+                  <a:srgbClr val="17251C"/>
                 </a:solidFill>
                 <a:latin typeface="Malgun Gothic" pitchFamily="34" charset="0"/>
                 <a:ea typeface="Malgun Gothic" pitchFamily="34" charset="-122"/>
@@ -2217,7 +2239,7 @@
             <a:r>
               <a:rPr lang="en-US" sz="2200" b="1" dirty="0">
                 <a:solidFill>
-                  <a:srgbClr val="D9D7D3"/>
+                  <a:srgbClr val="5BD41E"/>
                 </a:solidFill>
                 <a:latin typeface="Malgun Gothic" pitchFamily="34" charset="0"/>
                 <a:ea typeface="Malgun Gothic" pitchFamily="34" charset="-122"/>
@@ -2240,15 +2262,17 @@
             <a:off x="3337560" y="1691640"/>
             <a:ext cx="2514600" cy="2103120"/>
           </a:xfrm>
-          <a:prstGeom prst="rect">
-            <a:avLst/>
+          <a:prstGeom prst="roundRect">
+            <a:avLst>
+              <a:gd name="adj" fmla="val 4348"/>
+            </a:avLst>
           </a:prstGeom>
           <a:solidFill>
-            <a:srgbClr val="F8F7F5"/>
+            <a:srgbClr val="FFFFFF"/>
           </a:solidFill>
           <a:ln w="12700">
             <a:solidFill>
-              <a:srgbClr val="D9D7D3"/>
+              <a:srgbClr val="E3ECDA"/>
             </a:solidFill>
             <a:prstDash val="solid"/>
           </a:ln>
@@ -2281,7 +2305,7 @@
             <a:r>
               <a:rPr lang="en-US" sz="1650" b="1" dirty="0">
                 <a:solidFill>
-                  <a:srgbClr val="004E36"/>
+                  <a:srgbClr val="2F9E14"/>
                 </a:solidFill>
                 <a:latin typeface="Malgun Gothic" pitchFamily="34" charset="0"/>
                 <a:ea typeface="Malgun Gothic" pitchFamily="34" charset="-122"/>
@@ -2320,7 +2344,7 @@
             <a:r>
               <a:rPr lang="en-US" sz="1250" dirty="0">
                 <a:solidFill>
-                  <a:srgbClr val="2E2D2B"/>
+                  <a:srgbClr val="17251C"/>
                 </a:solidFill>
                 <a:latin typeface="Malgun Gothic" pitchFamily="34" charset="0"/>
                 <a:ea typeface="Malgun Gothic" pitchFamily="34" charset="-122"/>
@@ -2337,7 +2361,7 @@
             <a:r>
               <a:rPr lang="en-US" sz="1250" dirty="0">
                 <a:solidFill>
-                  <a:srgbClr val="2E2D2B"/>
+                  <a:srgbClr val="17251C"/>
                 </a:solidFill>
                 <a:latin typeface="Malgun Gothic" pitchFamily="34" charset="0"/>
                 <a:ea typeface="Malgun Gothic" pitchFamily="34" charset="-122"/>
@@ -2376,7 +2400,7 @@
             <a:r>
               <a:rPr lang="en-US" sz="2200" b="1" dirty="0">
                 <a:solidFill>
-                  <a:srgbClr val="D9D7D3"/>
+                  <a:srgbClr val="5BD41E"/>
                 </a:solidFill>
                 <a:latin typeface="Malgun Gothic" pitchFamily="34" charset="0"/>
                 <a:ea typeface="Malgun Gothic" pitchFamily="34" charset="-122"/>
@@ -2399,15 +2423,17 @@
             <a:off x="6126480" y="1691640"/>
             <a:ext cx="2514600" cy="2103120"/>
           </a:xfrm>
-          <a:prstGeom prst="rect">
-            <a:avLst/>
+          <a:prstGeom prst="roundRect">
+            <a:avLst>
+              <a:gd name="adj" fmla="val 4348"/>
+            </a:avLst>
           </a:prstGeom>
           <a:solidFill>
-            <a:srgbClr val="E7EFEA"/>
+            <a:srgbClr val="E7F9D7"/>
           </a:solidFill>
-          <a:ln w="12700">
+          <a:ln w="19050">
             <a:solidFill>
-              <a:srgbClr val="004E36"/>
+              <a:srgbClr val="5BD41E"/>
             </a:solidFill>
             <a:prstDash val="solid"/>
           </a:ln>
@@ -2440,7 +2466,7 @@
             <a:r>
               <a:rPr lang="en-US" sz="1650" b="1" dirty="0">
                 <a:solidFill>
-                  <a:srgbClr val="004E36"/>
+                  <a:srgbClr val="2F9E14"/>
                 </a:solidFill>
                 <a:latin typeface="Malgun Gothic" pitchFamily="34" charset="0"/>
                 <a:ea typeface="Malgun Gothic" pitchFamily="34" charset="-122"/>
@@ -2479,7 +2505,7 @@
             <a:r>
               <a:rPr lang="en-US" sz="1250" dirty="0">
                 <a:solidFill>
-                  <a:srgbClr val="2E2D2B"/>
+                  <a:srgbClr val="17251C"/>
                 </a:solidFill>
                 <a:latin typeface="Malgun Gothic" pitchFamily="34" charset="0"/>
                 <a:ea typeface="Malgun Gothic" pitchFamily="34" charset="-122"/>
@@ -2496,7 +2522,7 @@
             <a:r>
               <a:rPr lang="en-US" sz="1250" dirty="0">
                 <a:solidFill>
-                  <a:srgbClr val="2E2D2B"/>
+                  <a:srgbClr val="17251C"/>
                 </a:solidFill>
                 <a:latin typeface="Malgun Gothic" pitchFamily="34" charset="0"/>
                 <a:ea typeface="Malgun Gothic" pitchFamily="34" charset="-122"/>
@@ -2535,7 +2561,7 @@
             <a:r>
               <a:rPr lang="en-US" sz="1100" dirty="0">
                 <a:solidFill>
-                  <a:srgbClr val="6B6965"/>
+                  <a:srgbClr val="6D7A6F"/>
                 </a:solidFill>
                 <a:latin typeface="Malgun Gothic" pitchFamily="34" charset="0"/>
                 <a:ea typeface="Malgun Gothic" pitchFamily="34" charset="-122"/>
@@ -2561,7 +2587,7 @@
     <p:bg>
       <p:bgPr>
         <a:solidFill>
-          <a:srgbClr val="004E36"/>
+          <a:srgbClr val="16261A"/>
         </a:solidFill>
       </p:bgPr>
     </p:bg>
@@ -2601,6 +2627,9 @@
           <a:lstStyle/>
           <a:p>
             <a:pPr indent="0" marL="0">
+              <a:lnSpc>
+                <a:spcPct val="115000"/>
+              </a:lnSpc>
               <a:buNone/>
             </a:pPr>
             <a:r>
@@ -2612,24 +2641,28 @@
                 <a:ea typeface="Malgun Gothic" pitchFamily="34" charset="-122"/>
                 <a:cs typeface="Malgun Gothic" pitchFamily="34" charset="-120"/>
               </a:rPr>
-              <a:t>오늘, 냉장고에서</a:t>
-            </a:r>
-            <a:endParaRPr lang="en-US" sz="3600" dirty="0"/>
-          </a:p>
-          <a:p>
-            <a:pPr indent="0" marL="0">
+              <a:t>오늘, 냉장고에서
+</a:t>
+            </a:r>
+            <a:pPr indent="0" marL="0">
+              <a:lnSpc>
+                <a:spcPct val="115000"/>
+              </a:lnSpc>
               <a:buNone/>
             </a:pPr>
             <a:r>
               <a:rPr lang="en-US" sz="3600" b="1" dirty="0">
                 <a:solidFill>
-                  <a:srgbClr val="FFFFFF"/>
-                </a:solidFill>
-                <a:latin typeface="Malgun Gothic" pitchFamily="34" charset="0"/>
-                <a:ea typeface="Malgun Gothic" pitchFamily="34" charset="-122"/>
-                <a:cs typeface="Malgun Gothic" pitchFamily="34" charset="-120"/>
-              </a:rPr>
-              <a:t>이것부터.</a:t>
+                  <a:srgbClr val="14300A"/>
+                </a:solidFill>
+                <a:highlight>
+                  <a:srgbClr val="5BD41E"/>
+                </a:highlight>
+                <a:latin typeface="Malgun Gothic" pitchFamily="34" charset="0"/>
+                <a:ea typeface="Malgun Gothic" pitchFamily="34" charset="-122"/>
+                <a:cs typeface="Malgun Gothic" pitchFamily="34" charset="-120"/>
+              </a:rPr>
+              <a:t> 이것부터. </a:t>
             </a:r>
             <a:endParaRPr lang="en-US" sz="3600" dirty="0"/>
           </a:p>
@@ -2662,7 +2695,7 @@
             <a:r>
               <a:rPr lang="en-US" sz="1600" b="1" dirty="0">
                 <a:solidFill>
-                  <a:srgbClr val="CFE3DA"/>
+                  <a:srgbClr val="D8E8CE"/>
                 </a:solidFill>
                 <a:latin typeface="Malgun Gothic" pitchFamily="34" charset="0"/>
                 <a:ea typeface="Malgun Gothic" pitchFamily="34" charset="-122"/>
@@ -2701,7 +2734,7 @@
             <a:r>
               <a:rPr lang="en-US" sz="1250" dirty="0">
                 <a:solidFill>
-                  <a:srgbClr val="9FC3B4"/>
+                  <a:srgbClr val="8FA085"/>
                 </a:solidFill>
                 <a:latin typeface="Malgun Gothic" pitchFamily="34" charset="0"/>
                 <a:ea typeface="Malgun Gothic" pitchFamily="34" charset="-122"/>
@@ -2766,7 +2799,7 @@
     <p:bg>
       <p:bgPr>
         <a:solidFill>
-          <a:srgbClr val="FFFFFF"/>
+          <a:srgbClr val="FCFEF9"/>
         </a:solidFill>
       </p:bgPr>
     </p:bg>
@@ -2811,7 +2844,7 @@
             <a:r>
               <a:rPr lang="en-US" sz="1100" b="1" spc="300" kern="0" dirty="0">
                 <a:solidFill>
-                  <a:srgbClr val="004E36"/>
+                  <a:srgbClr val="2F9E14"/>
                 </a:solidFill>
                 <a:latin typeface="Malgun Gothic" pitchFamily="34" charset="0"/>
                 <a:ea typeface="Malgun Gothic" pitchFamily="34" charset="-122"/>
@@ -2850,7 +2883,7 @@
             <a:r>
               <a:rPr lang="en-US" sz="2700" b="1" dirty="0">
                 <a:solidFill>
-                  <a:srgbClr val="2E2D2B"/>
+                  <a:srgbClr val="17251C"/>
                 </a:solidFill>
                 <a:latin typeface="Malgun Gothic" pitchFamily="34" charset="0"/>
                 <a:ea typeface="Malgun Gothic" pitchFamily="34" charset="-122"/>
@@ -2873,15 +2906,17 @@
             <a:off x="548640" y="1691640"/>
             <a:ext cx="3886200" cy="731520"/>
           </a:xfrm>
-          <a:prstGeom prst="rect">
-            <a:avLst/>
+          <a:prstGeom prst="roundRect">
+            <a:avLst>
+              <a:gd name="adj" fmla="val 10000"/>
+            </a:avLst>
           </a:prstGeom>
           <a:solidFill>
-            <a:srgbClr val="F8F7F5"/>
+            <a:srgbClr val="FFFFFF"/>
           </a:solidFill>
           <a:ln w="12700">
             <a:solidFill>
-              <a:srgbClr val="D9D7D3"/>
+              <a:srgbClr val="E3ECDA"/>
             </a:solidFill>
             <a:prstDash val="solid"/>
           </a:ln>
@@ -2914,7 +2949,7 @@
             <a:r>
               <a:rPr lang="en-US" sz="1700" b="1" dirty="0">
                 <a:solidFill>
-                  <a:srgbClr val="004E36"/>
+                  <a:srgbClr val="2F9E14"/>
                 </a:solidFill>
                 <a:latin typeface="Malgun Gothic" pitchFamily="34" charset="0"/>
                 <a:ea typeface="Malgun Gothic" pitchFamily="34" charset="-122"/>
@@ -2937,15 +2972,17 @@
             <a:off x="4709160" y="1691640"/>
             <a:ext cx="3886200" cy="731520"/>
           </a:xfrm>
-          <a:prstGeom prst="rect">
-            <a:avLst/>
+          <a:prstGeom prst="roundRect">
+            <a:avLst>
+              <a:gd name="adj" fmla="val 10000"/>
+            </a:avLst>
           </a:prstGeom>
           <a:solidFill>
-            <a:srgbClr val="F8F7F5"/>
+            <a:srgbClr val="FFFFFF"/>
           </a:solidFill>
           <a:ln w="12700">
             <a:solidFill>
-              <a:srgbClr val="D9D7D3"/>
+              <a:srgbClr val="E3ECDA"/>
             </a:solidFill>
             <a:prstDash val="solid"/>
           </a:ln>
@@ -2978,7 +3015,7 @@
             <a:r>
               <a:rPr lang="en-US" sz="1700" b="1" dirty="0">
                 <a:solidFill>
-                  <a:srgbClr val="004E36"/>
+                  <a:srgbClr val="2F9E14"/>
                 </a:solidFill>
                 <a:latin typeface="Malgun Gothic" pitchFamily="34" charset="0"/>
                 <a:ea typeface="Malgun Gothic" pitchFamily="34" charset="-122"/>
@@ -3001,15 +3038,17 @@
             <a:off x="548640" y="2606040"/>
             <a:ext cx="3886200" cy="731520"/>
           </a:xfrm>
-          <a:prstGeom prst="rect">
-            <a:avLst/>
+          <a:prstGeom prst="roundRect">
+            <a:avLst>
+              <a:gd name="adj" fmla="val 10000"/>
+            </a:avLst>
           </a:prstGeom>
           <a:solidFill>
-            <a:srgbClr val="F8F7F5"/>
+            <a:srgbClr val="FFFFFF"/>
           </a:solidFill>
           <a:ln w="12700">
             <a:solidFill>
-              <a:srgbClr val="D9D7D3"/>
+              <a:srgbClr val="E3ECDA"/>
             </a:solidFill>
             <a:prstDash val="solid"/>
           </a:ln>
@@ -3042,7 +3081,7 @@
             <a:r>
               <a:rPr lang="en-US" sz="1700" b="1" dirty="0">
                 <a:solidFill>
-                  <a:srgbClr val="004E36"/>
+                  <a:srgbClr val="2F9E14"/>
                 </a:solidFill>
                 <a:latin typeface="Malgun Gothic" pitchFamily="34" charset="0"/>
                 <a:ea typeface="Malgun Gothic" pitchFamily="34" charset="-122"/>
@@ -3065,15 +3104,17 @@
             <a:off x="4709160" y="2606040"/>
             <a:ext cx="3886200" cy="731520"/>
           </a:xfrm>
-          <a:prstGeom prst="rect">
-            <a:avLst/>
+          <a:prstGeom prst="roundRect">
+            <a:avLst>
+              <a:gd name="adj" fmla="val 10000"/>
+            </a:avLst>
           </a:prstGeom>
           <a:solidFill>
-            <a:srgbClr val="F8F7F5"/>
+            <a:srgbClr val="FFFFFF"/>
           </a:solidFill>
           <a:ln w="12700">
             <a:solidFill>
-              <a:srgbClr val="D9D7D3"/>
+              <a:srgbClr val="E3ECDA"/>
             </a:solidFill>
             <a:prstDash val="solid"/>
           </a:ln>
@@ -3106,7 +3147,7 @@
             <a:r>
               <a:rPr lang="en-US" sz="1700" b="1" dirty="0">
                 <a:solidFill>
-                  <a:srgbClr val="004E36"/>
+                  <a:srgbClr val="2F9E14"/>
                 </a:solidFill>
                 <a:latin typeface="Malgun Gothic" pitchFamily="34" charset="0"/>
                 <a:ea typeface="Malgun Gothic" pitchFamily="34" charset="-122"/>
@@ -3145,7 +3186,7 @@
             <a:r>
               <a:rPr lang="en-US" sz="1500" dirty="0">
                 <a:solidFill>
-                  <a:srgbClr val="6B6965"/>
+                  <a:srgbClr val="6D7A6F"/>
                 </a:solidFill>
                 <a:latin typeface="Malgun Gothic" pitchFamily="34" charset="0"/>
                 <a:ea typeface="Malgun Gothic" pitchFamily="34" charset="-122"/>
@@ -3159,7 +3200,7 @@
             <a:r>
               <a:rPr lang="en-US" sz="1500" b="1" dirty="0">
                 <a:solidFill>
-                  <a:srgbClr val="B3410F"/>
+                  <a:srgbClr val="EF4A25"/>
                 </a:solidFill>
                 <a:latin typeface="Malgun Gothic" pitchFamily="34" charset="0"/>
                 <a:ea typeface="Malgun Gothic" pitchFamily="34" charset="-122"/>
@@ -3173,7 +3214,7 @@
             <a:r>
               <a:rPr lang="en-US" sz="1500" dirty="0">
                 <a:solidFill>
-                  <a:srgbClr val="6B6965"/>
+                  <a:srgbClr val="6D7A6F"/>
                 </a:solidFill>
                 <a:latin typeface="Malgun Gothic" pitchFamily="34" charset="0"/>
                 <a:ea typeface="Malgun Gothic" pitchFamily="34" charset="-122"/>
@@ -3187,7 +3228,7 @@
             <a:r>
               <a:rPr lang="en-US" sz="1500" b="1" dirty="0">
                 <a:solidFill>
-                  <a:srgbClr val="B3410F"/>
+                  <a:srgbClr val="EF4A25"/>
                 </a:solidFill>
                 <a:latin typeface="Malgun Gothic" pitchFamily="34" charset="0"/>
                 <a:ea typeface="Malgun Gothic" pitchFamily="34" charset="-122"/>
@@ -3213,7 +3254,7 @@
     <p:bg>
       <p:bgPr>
         <a:solidFill>
-          <a:srgbClr val="FFFFFF"/>
+          <a:srgbClr val="FCFEF9"/>
         </a:solidFill>
       </p:bgPr>
     </p:bg>
@@ -3258,7 +3299,7 @@
             <a:r>
               <a:rPr lang="en-US" sz="1100" b="1" spc="300" kern="0" dirty="0">
                 <a:solidFill>
-                  <a:srgbClr val="004E36"/>
+                  <a:srgbClr val="2F9E14"/>
                 </a:solidFill>
                 <a:latin typeface="Malgun Gothic" pitchFamily="34" charset="0"/>
                 <a:ea typeface="Malgun Gothic" pitchFamily="34" charset="-122"/>
@@ -3297,7 +3338,7 @@
             <a:r>
               <a:rPr lang="en-US" sz="2700" b="1" dirty="0">
                 <a:solidFill>
-                  <a:srgbClr val="2E2D2B"/>
+                  <a:srgbClr val="17251C"/>
                 </a:solidFill>
                 <a:latin typeface="Malgun Gothic" pitchFamily="34" charset="0"/>
                 <a:ea typeface="Malgun Gothic" pitchFamily="34" charset="-122"/>
@@ -3336,7 +3377,7 @@
             <a:r>
               <a:rPr lang="en-US" sz="6400" b="1" dirty="0">
                 <a:solidFill>
-                  <a:srgbClr val="004E36"/>
+                  <a:srgbClr val="EF4A25"/>
                 </a:solidFill>
                 <a:latin typeface="Malgun Gothic" pitchFamily="34" charset="0"/>
                 <a:ea typeface="Malgun Gothic" pitchFamily="34" charset="-122"/>
@@ -3375,7 +3416,7 @@
             <a:r>
               <a:rPr lang="en-US" sz="1400" dirty="0">
                 <a:solidFill>
-                  <a:srgbClr val="6B6965"/>
+                  <a:srgbClr val="6D7A6F"/>
                 </a:solidFill>
                 <a:latin typeface="Malgun Gothic" pitchFamily="34" charset="0"/>
                 <a:ea typeface="Malgun Gothic" pitchFamily="34" charset="-122"/>
@@ -3414,7 +3455,7 @@
             <a:r>
               <a:rPr lang="en-US" sz="6400" b="1" dirty="0">
                 <a:solidFill>
-                  <a:srgbClr val="2E2D2B"/>
+                  <a:srgbClr val="17251C"/>
                 </a:solidFill>
                 <a:latin typeface="Malgun Gothic" pitchFamily="34" charset="0"/>
                 <a:ea typeface="Malgun Gothic" pitchFamily="34" charset="-122"/>
@@ -3453,7 +3494,7 @@
             <a:r>
               <a:rPr lang="en-US" sz="1400" dirty="0">
                 <a:solidFill>
-                  <a:srgbClr val="6B6965"/>
+                  <a:srgbClr val="6D7A6F"/>
                 </a:solidFill>
                 <a:latin typeface="Malgun Gothic" pitchFamily="34" charset="0"/>
                 <a:ea typeface="Malgun Gothic" pitchFamily="34" charset="-122"/>
@@ -3476,18 +3517,15 @@
             <a:off x="548640" y="3611880"/>
             <a:ext cx="8046720" cy="685800"/>
           </a:xfrm>
-          <a:prstGeom prst="rect">
-            <a:avLst/>
+          <a:prstGeom prst="roundRect">
+            <a:avLst>
+              <a:gd name="adj" fmla="val 10667"/>
+            </a:avLst>
           </a:prstGeom>
           <a:solidFill>
-            <a:srgbClr val="F8F7F5"/>
+            <a:srgbClr val="E7F9D7"/>
           </a:solidFill>
-          <a:ln w="12700">
-            <a:solidFill>
-              <a:srgbClr val="D9D7D3"/>
-            </a:solidFill>
-            <a:prstDash val="solid"/>
-          </a:ln>
+          <a:ln/>
         </p:spPr>
       </p:sp>
       <p:sp>
@@ -3517,7 +3555,7 @@
             <a:r>
               <a:rPr lang="en-US" sz="1500" b="1" dirty="0">
                 <a:solidFill>
-                  <a:srgbClr val="2E2D2B"/>
+                  <a:srgbClr val="17251C"/>
                 </a:solidFill>
                 <a:latin typeface="Malgun Gothic" pitchFamily="34" charset="0"/>
                 <a:ea typeface="Malgun Gothic" pitchFamily="34" charset="-122"/>
@@ -3556,7 +3594,7 @@
             <a:r>
               <a:rPr lang="en-US" sz="950" dirty="0">
                 <a:solidFill>
-                  <a:srgbClr val="6B6965"/>
+                  <a:srgbClr val="6D7A6F"/>
                 </a:solidFill>
                 <a:latin typeface="Malgun Gothic" pitchFamily="34" charset="0"/>
                 <a:ea typeface="Malgun Gothic" pitchFamily="34" charset="-122"/>
@@ -3582,7 +3620,7 @@
     <p:bg>
       <p:bgPr>
         <a:solidFill>
-          <a:srgbClr val="FFFFFF"/>
+          <a:srgbClr val="FCFEF9"/>
         </a:solidFill>
       </p:bgPr>
     </p:bg>
@@ -3627,7 +3665,7 @@
             <a:r>
               <a:rPr lang="en-US" sz="1100" b="1" spc="300" kern="0" dirty="0">
                 <a:solidFill>
-                  <a:srgbClr val="004E36"/>
+                  <a:srgbClr val="2F9E14"/>
                 </a:solidFill>
                 <a:latin typeface="Malgun Gothic" pitchFamily="34" charset="0"/>
                 <a:ea typeface="Malgun Gothic" pitchFamily="34" charset="-122"/>
@@ -3666,7 +3704,7 @@
             <a:r>
               <a:rPr lang="en-US" sz="2700" b="1" dirty="0">
                 <a:solidFill>
-                  <a:srgbClr val="2E2D2B"/>
+                  <a:srgbClr val="17251C"/>
                 </a:solidFill>
                 <a:latin typeface="Malgun Gothic" pitchFamily="34" charset="0"/>
                 <a:ea typeface="Malgun Gothic" pitchFamily="34" charset="-122"/>
@@ -3689,15 +3727,17 @@
             <a:off x="548640" y="1645920"/>
             <a:ext cx="2514600" cy="2514600"/>
           </a:xfrm>
-          <a:prstGeom prst="rect">
-            <a:avLst/>
+          <a:prstGeom prst="roundRect">
+            <a:avLst>
+              <a:gd name="adj" fmla="val 3636"/>
+            </a:avLst>
           </a:prstGeom>
           <a:solidFill>
-            <a:srgbClr val="F8F7F5"/>
+            <a:srgbClr val="FFFFFF"/>
           </a:solidFill>
           <a:ln w="12700">
             <a:solidFill>
-              <a:srgbClr val="D9D7D3"/>
+              <a:srgbClr val="E3ECDA"/>
             </a:solidFill>
             <a:prstDash val="solid"/>
           </a:ln>
@@ -3705,30 +3745,52 @@
       </p:sp>
       <p:sp>
         <p:nvSpPr>
-          <p:cNvPr id="5" name="Text 3"/>
+          <p:cNvPr id="5" name="Shape 3"/>
           <p:cNvSpPr/>
           <p:nvPr/>
         </p:nvSpPr>
         <p:spPr>
           <a:xfrm>
             <a:off x="777240" y="1874520"/>
-            <a:ext cx="2103120" cy="502920"/>
-          </a:xfrm>
-          <a:prstGeom prst="rect">
-            <a:avLst/>
-          </a:prstGeom>
-          <a:noFill/>
-          <a:ln/>
-        </p:spPr>
-        <p:txBody>
-          <a:bodyPr wrap="square" lIns="0" tIns="0" rIns="0" bIns="0" rtlCol="0" anchor="ctr"/>
-          <a:lstStyle/>
-          <a:p>
-            <a:pPr indent="0" marL="0">
-              <a:buNone/>
-            </a:pPr>
-            <a:r>
-              <a:rPr lang="en-US" sz="2600" dirty="0">
+            <a:ext cx="566928" cy="566928"/>
+          </a:xfrm>
+          <a:prstGeom prst="roundRect">
+            <a:avLst>
+              <a:gd name="adj" fmla="val 16129"/>
+            </a:avLst>
+          </a:prstGeom>
+          <a:solidFill>
+            <a:srgbClr val="E7F9D7"/>
+          </a:solidFill>
+          <a:ln/>
+        </p:spPr>
+      </p:sp>
+      <p:sp>
+        <p:nvSpPr>
+          <p:cNvPr id="6" name="Text 4"/>
+          <p:cNvSpPr/>
+          <p:nvPr/>
+        </p:nvSpPr>
+        <p:spPr>
+          <a:xfrm>
+            <a:off x="777240" y="1874520"/>
+            <a:ext cx="566928" cy="566928"/>
+          </a:xfrm>
+          <a:prstGeom prst="rect">
+            <a:avLst/>
+          </a:prstGeom>
+          <a:noFill/>
+          <a:ln/>
+        </p:spPr>
+        <p:txBody>
+          <a:bodyPr wrap="square" lIns="0" tIns="0" rIns="0" bIns="0" rtlCol="0" anchor="ctr"/>
+          <a:lstStyle/>
+          <a:p>
+            <a:pPr algn="ctr" indent="0" marL="0">
+              <a:buNone/>
+            </a:pPr>
+            <a:r>
+              <a:rPr lang="en-US" sz="2200" dirty="0">
                 <a:solidFill>
                   <a:srgbClr val="000000"/>
                 </a:solidFill>
@@ -3738,19 +3800,19 @@
               </a:rPr>
               <a:t>⏱</a:t>
             </a:r>
-            <a:endParaRPr lang="en-US" sz="2600" dirty="0"/>
-          </a:p>
-        </p:txBody>
-      </p:sp>
-      <p:sp>
-        <p:nvSpPr>
-          <p:cNvPr id="6" name="Text 4"/>
-          <p:cNvSpPr/>
-          <p:nvPr/>
-        </p:nvSpPr>
-        <p:spPr>
-          <a:xfrm>
-            <a:off x="777240" y="2468880"/>
+            <a:endParaRPr lang="en-US" sz="2200" dirty="0"/>
+          </a:p>
+        </p:txBody>
+      </p:sp>
+      <p:sp>
+        <p:nvSpPr>
+          <p:cNvPr id="7" name="Text 5"/>
+          <p:cNvSpPr/>
+          <p:nvPr/>
+        </p:nvSpPr>
+        <p:spPr>
+          <a:xfrm>
+            <a:off x="777240" y="2578608"/>
             <a:ext cx="2103120" cy="411480"/>
           </a:xfrm>
           <a:prstGeom prst="rect">
@@ -3769,7 +3831,7 @@
             <a:r>
               <a:rPr lang="en-US" sz="1750" b="1" dirty="0">
                 <a:solidFill>
-                  <a:srgbClr val="004E36"/>
+                  <a:srgbClr val="2F9E14"/>
                 </a:solidFill>
                 <a:latin typeface="Malgun Gothic" pitchFamily="34" charset="0"/>
                 <a:ea typeface="Malgun Gothic" pitchFamily="34" charset="-122"/>
@@ -3783,13 +3845,13 @@
       </p:sp>
       <p:sp>
         <p:nvSpPr>
-          <p:cNvPr id="7" name="Text 5"/>
-          <p:cNvSpPr/>
-          <p:nvPr/>
-        </p:nvSpPr>
-        <p:spPr>
-          <a:xfrm>
-            <a:off x="777240" y="2971800"/>
+          <p:cNvPr id="8" name="Text 6"/>
+          <p:cNvSpPr/>
+          <p:nvPr/>
+        </p:nvSpPr>
+        <p:spPr>
+          <a:xfrm>
+            <a:off x="777240" y="3063240"/>
             <a:ext cx="2103120" cy="1005840"/>
           </a:xfrm>
           <a:prstGeom prst="rect">
@@ -3808,7 +3870,7 @@
             <a:r>
               <a:rPr lang="en-US" sz="1250" dirty="0">
                 <a:solidFill>
-                  <a:srgbClr val="6B6965"/>
+                  <a:srgbClr val="6D7A6F"/>
                 </a:solidFill>
                 <a:latin typeface="Malgun Gothic" pitchFamily="34" charset="0"/>
                 <a:ea typeface="Malgun Gothic" pitchFamily="34" charset="-122"/>
@@ -3825,7 +3887,7 @@
             <a:r>
               <a:rPr lang="en-US" sz="1250" dirty="0">
                 <a:solidFill>
-                  <a:srgbClr val="6B6965"/>
+                  <a:srgbClr val="6D7A6F"/>
                 </a:solidFill>
                 <a:latin typeface="Malgun Gothic" pitchFamily="34" charset="0"/>
                 <a:ea typeface="Malgun Gothic" pitchFamily="34" charset="-122"/>
@@ -3839,7 +3901,7 @@
       </p:sp>
       <p:sp>
         <p:nvSpPr>
-          <p:cNvPr id="8" name="Shape 6"/>
+          <p:cNvPr id="9" name="Shape 7"/>
           <p:cNvSpPr/>
           <p:nvPr/>
         </p:nvSpPr>
@@ -3848,15 +3910,17 @@
             <a:off x="3337560" y="1645920"/>
             <a:ext cx="2514600" cy="2514600"/>
           </a:xfrm>
-          <a:prstGeom prst="rect">
-            <a:avLst/>
+          <a:prstGeom prst="roundRect">
+            <a:avLst>
+              <a:gd name="adj" fmla="val 3636"/>
+            </a:avLst>
           </a:prstGeom>
           <a:solidFill>
-            <a:srgbClr val="F8F7F5"/>
+            <a:srgbClr val="FFFFFF"/>
           </a:solidFill>
           <a:ln w="12700">
             <a:solidFill>
-              <a:srgbClr val="D9D7D3"/>
+              <a:srgbClr val="E3ECDA"/>
             </a:solidFill>
             <a:prstDash val="solid"/>
           </a:ln>
@@ -3864,30 +3928,52 @@
       </p:sp>
       <p:sp>
         <p:nvSpPr>
-          <p:cNvPr id="9" name="Text 7"/>
+          <p:cNvPr id="10" name="Shape 8"/>
           <p:cNvSpPr/>
           <p:nvPr/>
         </p:nvSpPr>
         <p:spPr>
           <a:xfrm>
             <a:off x="3566160" y="1874520"/>
-            <a:ext cx="2103120" cy="502920"/>
-          </a:xfrm>
-          <a:prstGeom prst="rect">
-            <a:avLst/>
-          </a:prstGeom>
-          <a:noFill/>
-          <a:ln/>
-        </p:spPr>
-        <p:txBody>
-          <a:bodyPr wrap="square" lIns="0" tIns="0" rIns="0" bIns="0" rtlCol="0" anchor="ctr"/>
-          <a:lstStyle/>
-          <a:p>
-            <a:pPr indent="0" marL="0">
-              <a:buNone/>
-            </a:pPr>
-            <a:r>
-              <a:rPr lang="en-US" sz="2600" dirty="0">
+            <a:ext cx="566928" cy="566928"/>
+          </a:xfrm>
+          <a:prstGeom prst="roundRect">
+            <a:avLst>
+              <a:gd name="adj" fmla="val 16129"/>
+            </a:avLst>
+          </a:prstGeom>
+          <a:solidFill>
+            <a:srgbClr val="E7F9D7"/>
+          </a:solidFill>
+          <a:ln/>
+        </p:spPr>
+      </p:sp>
+      <p:sp>
+        <p:nvSpPr>
+          <p:cNvPr id="11" name="Text 9"/>
+          <p:cNvSpPr/>
+          <p:nvPr/>
+        </p:nvSpPr>
+        <p:spPr>
+          <a:xfrm>
+            <a:off x="3566160" y="1874520"/>
+            <a:ext cx="566928" cy="566928"/>
+          </a:xfrm>
+          <a:prstGeom prst="rect">
+            <a:avLst/>
+          </a:prstGeom>
+          <a:noFill/>
+          <a:ln/>
+        </p:spPr>
+        <p:txBody>
+          <a:bodyPr wrap="square" lIns="0" tIns="0" rIns="0" bIns="0" rtlCol="0" anchor="ctr"/>
+          <a:lstStyle/>
+          <a:p>
+            <a:pPr algn="ctr" indent="0" marL="0">
+              <a:buNone/>
+            </a:pPr>
+            <a:r>
+              <a:rPr lang="en-US" sz="2200" dirty="0">
                 <a:solidFill>
                   <a:srgbClr val="000000"/>
                 </a:solidFill>
@@ -3897,19 +3983,19 @@
               </a:rPr>
               <a:t>🗺</a:t>
             </a:r>
-            <a:endParaRPr lang="en-US" sz="2600" dirty="0"/>
-          </a:p>
-        </p:txBody>
-      </p:sp>
-      <p:sp>
-        <p:nvSpPr>
-          <p:cNvPr id="10" name="Text 8"/>
-          <p:cNvSpPr/>
-          <p:nvPr/>
-        </p:nvSpPr>
-        <p:spPr>
-          <a:xfrm>
-            <a:off x="3566160" y="2468880"/>
+            <a:endParaRPr lang="en-US" sz="2200" dirty="0"/>
+          </a:p>
+        </p:txBody>
+      </p:sp>
+      <p:sp>
+        <p:nvSpPr>
+          <p:cNvPr id="12" name="Text 10"/>
+          <p:cNvSpPr/>
+          <p:nvPr/>
+        </p:nvSpPr>
+        <p:spPr>
+          <a:xfrm>
+            <a:off x="3566160" y="2578608"/>
             <a:ext cx="2103120" cy="411480"/>
           </a:xfrm>
           <a:prstGeom prst="rect">
@@ -3928,7 +4014,7 @@
             <a:r>
               <a:rPr lang="en-US" sz="1750" b="1" dirty="0">
                 <a:solidFill>
-                  <a:srgbClr val="004E36"/>
+                  <a:srgbClr val="2F9E14"/>
                 </a:solidFill>
                 <a:latin typeface="Malgun Gothic" pitchFamily="34" charset="0"/>
                 <a:ea typeface="Malgun Gothic" pitchFamily="34" charset="-122"/>
@@ -3942,13 +4028,13 @@
       </p:sp>
       <p:sp>
         <p:nvSpPr>
-          <p:cNvPr id="11" name="Text 9"/>
-          <p:cNvSpPr/>
-          <p:nvPr/>
-        </p:nvSpPr>
-        <p:spPr>
-          <a:xfrm>
-            <a:off x="3566160" y="2971800"/>
+          <p:cNvPr id="13" name="Text 11"/>
+          <p:cNvSpPr/>
+          <p:nvPr/>
+        </p:nvSpPr>
+        <p:spPr>
+          <a:xfrm>
+            <a:off x="3566160" y="3063240"/>
             <a:ext cx="2103120" cy="1005840"/>
           </a:xfrm>
           <a:prstGeom prst="rect">
@@ -3967,7 +4053,7 @@
             <a:r>
               <a:rPr lang="en-US" sz="1250" dirty="0">
                 <a:solidFill>
-                  <a:srgbClr val="6B6965"/>
+                  <a:srgbClr val="6D7A6F"/>
                 </a:solidFill>
                 <a:latin typeface="Malgun Gothic" pitchFamily="34" charset="0"/>
                 <a:ea typeface="Malgun Gothic" pitchFamily="34" charset="-122"/>
@@ -3984,7 +4070,7 @@
             <a:r>
               <a:rPr lang="en-US" sz="1250" dirty="0">
                 <a:solidFill>
-                  <a:srgbClr val="6B6965"/>
+                  <a:srgbClr val="6D7A6F"/>
                 </a:solidFill>
                 <a:latin typeface="Malgun Gothic" pitchFamily="34" charset="0"/>
                 <a:ea typeface="Malgun Gothic" pitchFamily="34" charset="-122"/>
@@ -3998,7 +4084,7 @@
       </p:sp>
       <p:sp>
         <p:nvSpPr>
-          <p:cNvPr id="12" name="Shape 10"/>
+          <p:cNvPr id="14" name="Shape 12"/>
           <p:cNvSpPr/>
           <p:nvPr/>
         </p:nvSpPr>
@@ -4007,15 +4093,17 @@
             <a:off x="6126480" y="1645920"/>
             <a:ext cx="2514600" cy="2514600"/>
           </a:xfrm>
-          <a:prstGeom prst="rect">
-            <a:avLst/>
+          <a:prstGeom prst="roundRect">
+            <a:avLst>
+              <a:gd name="adj" fmla="val 3636"/>
+            </a:avLst>
           </a:prstGeom>
           <a:solidFill>
-            <a:srgbClr val="F8F7F5"/>
+            <a:srgbClr val="FFFFFF"/>
           </a:solidFill>
           <a:ln w="12700">
             <a:solidFill>
-              <a:srgbClr val="D9D7D3"/>
+              <a:srgbClr val="E3ECDA"/>
             </a:solidFill>
             <a:prstDash val="solid"/>
           </a:ln>
@@ -4023,30 +4111,52 @@
       </p:sp>
       <p:sp>
         <p:nvSpPr>
-          <p:cNvPr id="13" name="Text 11"/>
+          <p:cNvPr id="15" name="Shape 13"/>
           <p:cNvSpPr/>
           <p:nvPr/>
         </p:nvSpPr>
         <p:spPr>
           <a:xfrm>
             <a:off x="6355080" y="1874520"/>
-            <a:ext cx="2103120" cy="502920"/>
-          </a:xfrm>
-          <a:prstGeom prst="rect">
-            <a:avLst/>
-          </a:prstGeom>
-          <a:noFill/>
-          <a:ln/>
-        </p:spPr>
-        <p:txBody>
-          <a:bodyPr wrap="square" lIns="0" tIns="0" rIns="0" bIns="0" rtlCol="0" anchor="ctr"/>
-          <a:lstStyle/>
-          <a:p>
-            <a:pPr indent="0" marL="0">
-              <a:buNone/>
-            </a:pPr>
-            <a:r>
-              <a:rPr lang="en-US" sz="2600" dirty="0">
+            <a:ext cx="566928" cy="566928"/>
+          </a:xfrm>
+          <a:prstGeom prst="roundRect">
+            <a:avLst>
+              <a:gd name="adj" fmla="val 16129"/>
+            </a:avLst>
+          </a:prstGeom>
+          <a:solidFill>
+            <a:srgbClr val="E7F9D7"/>
+          </a:solidFill>
+          <a:ln/>
+        </p:spPr>
+      </p:sp>
+      <p:sp>
+        <p:nvSpPr>
+          <p:cNvPr id="16" name="Text 14"/>
+          <p:cNvSpPr/>
+          <p:nvPr/>
+        </p:nvSpPr>
+        <p:spPr>
+          <a:xfrm>
+            <a:off x="6355080" y="1874520"/>
+            <a:ext cx="566928" cy="566928"/>
+          </a:xfrm>
+          <a:prstGeom prst="rect">
+            <a:avLst/>
+          </a:prstGeom>
+          <a:noFill/>
+          <a:ln/>
+        </p:spPr>
+        <p:txBody>
+          <a:bodyPr wrap="square" lIns="0" tIns="0" rIns="0" bIns="0" rtlCol="0" anchor="ctr"/>
+          <a:lstStyle/>
+          <a:p>
+            <a:pPr algn="ctr" indent="0" marL="0">
+              <a:buNone/>
+            </a:pPr>
+            <a:r>
+              <a:rPr lang="en-US" sz="2200" dirty="0">
                 <a:solidFill>
                   <a:srgbClr val="000000"/>
                 </a:solidFill>
@@ -4056,19 +4166,19 @@
               </a:rPr>
               <a:t>👉</a:t>
             </a:r>
-            <a:endParaRPr lang="en-US" sz="2600" dirty="0"/>
-          </a:p>
-        </p:txBody>
-      </p:sp>
-      <p:sp>
-        <p:nvSpPr>
-          <p:cNvPr id="14" name="Text 12"/>
-          <p:cNvSpPr/>
-          <p:nvPr/>
-        </p:nvSpPr>
-        <p:spPr>
-          <a:xfrm>
-            <a:off x="6355080" y="2468880"/>
+            <a:endParaRPr lang="en-US" sz="2200" dirty="0"/>
+          </a:p>
+        </p:txBody>
+      </p:sp>
+      <p:sp>
+        <p:nvSpPr>
+          <p:cNvPr id="17" name="Text 15"/>
+          <p:cNvSpPr/>
+          <p:nvPr/>
+        </p:nvSpPr>
+        <p:spPr>
+          <a:xfrm>
+            <a:off x="6355080" y="2578608"/>
             <a:ext cx="2103120" cy="411480"/>
           </a:xfrm>
           <a:prstGeom prst="rect">
@@ -4087,7 +4197,7 @@
             <a:r>
               <a:rPr lang="en-US" sz="1750" b="1" dirty="0">
                 <a:solidFill>
-                  <a:srgbClr val="004E36"/>
+                  <a:srgbClr val="2F9E14"/>
                 </a:solidFill>
                 <a:latin typeface="Malgun Gothic" pitchFamily="34" charset="0"/>
                 <a:ea typeface="Malgun Gothic" pitchFamily="34" charset="-122"/>
@@ -4101,13 +4211,13 @@
       </p:sp>
       <p:sp>
         <p:nvSpPr>
-          <p:cNvPr id="15" name="Text 13"/>
-          <p:cNvSpPr/>
-          <p:nvPr/>
-        </p:nvSpPr>
-        <p:spPr>
-          <a:xfrm>
-            <a:off x="6355080" y="2971800"/>
+          <p:cNvPr id="18" name="Text 16"/>
+          <p:cNvSpPr/>
+          <p:nvPr/>
+        </p:nvSpPr>
+        <p:spPr>
+          <a:xfrm>
+            <a:off x="6355080" y="3063240"/>
             <a:ext cx="2103120" cy="1005840"/>
           </a:xfrm>
           <a:prstGeom prst="rect">
@@ -4126,7 +4236,7 @@
             <a:r>
               <a:rPr lang="en-US" sz="1250" dirty="0">
                 <a:solidFill>
-                  <a:srgbClr val="6B6965"/>
+                  <a:srgbClr val="6D7A6F"/>
                 </a:solidFill>
                 <a:latin typeface="Malgun Gothic" pitchFamily="34" charset="0"/>
                 <a:ea typeface="Malgun Gothic" pitchFamily="34" charset="-122"/>
@@ -4143,7 +4253,7 @@
             <a:r>
               <a:rPr lang="en-US" sz="1250" dirty="0">
                 <a:solidFill>
-                  <a:srgbClr val="6B6965"/>
+                  <a:srgbClr val="6D7A6F"/>
                 </a:solidFill>
                 <a:latin typeface="Malgun Gothic" pitchFamily="34" charset="0"/>
                 <a:ea typeface="Malgun Gothic" pitchFamily="34" charset="-122"/>
@@ -4157,7 +4267,7 @@
       </p:sp>
       <p:sp>
         <p:nvSpPr>
-          <p:cNvPr id="16" name="Text 14"/>
+          <p:cNvPr id="19" name="Text 17"/>
           <p:cNvSpPr/>
           <p:nvPr/>
         </p:nvSpPr>
@@ -4182,7 +4292,7 @@
             <a:r>
               <a:rPr lang="en-US" sz="1300" dirty="0">
                 <a:solidFill>
-                  <a:srgbClr val="6B6965"/>
+                  <a:srgbClr val="6D7A6F"/>
                 </a:solidFill>
                 <a:latin typeface="Malgun Gothic" pitchFamily="34" charset="0"/>
                 <a:ea typeface="Malgun Gothic" pitchFamily="34" charset="-122"/>
@@ -4208,7 +4318,7 @@
     <p:bg>
       <p:bgPr>
         <a:solidFill>
-          <a:srgbClr val="FFFFFF"/>
+          <a:srgbClr val="FCFEF9"/>
         </a:solidFill>
       </p:bgPr>
     </p:bg>
@@ -4253,7 +4363,7 @@
             <a:r>
               <a:rPr lang="en-US" sz="1100" b="1" spc="300" kern="0" dirty="0">
                 <a:solidFill>
-                  <a:srgbClr val="004E36"/>
+                  <a:srgbClr val="2F9E14"/>
                 </a:solidFill>
                 <a:latin typeface="Malgun Gothic" pitchFamily="34" charset="0"/>
                 <a:ea typeface="Malgun Gothic" pitchFamily="34" charset="-122"/>
@@ -4292,7 +4402,7 @@
             <a:r>
               <a:rPr lang="en-US" sz="2500" b="1" dirty="0">
                 <a:solidFill>
-                  <a:srgbClr val="2E2D2B"/>
+                  <a:srgbClr val="17251C"/>
                 </a:solidFill>
                 <a:latin typeface="Malgun Gothic" pitchFamily="34" charset="0"/>
                 <a:ea typeface="Malgun Gothic" pitchFamily="34" charset="-122"/>
@@ -4331,7 +4441,7 @@
             <a:r>
               <a:rPr lang="en-US" sz="1450" dirty="0">
                 <a:solidFill>
-                  <a:srgbClr val="6B6965"/>
+                  <a:srgbClr val="6D7A6F"/>
                 </a:solidFill>
                 <a:latin typeface="Malgun Gothic" pitchFamily="34" charset="0"/>
                 <a:ea typeface="Malgun Gothic" pitchFamily="34" charset="-122"/>
@@ -4348,7 +4458,7 @@
             <a:r>
               <a:rPr lang="en-US" sz="1450" dirty="0">
                 <a:solidFill>
-                  <a:srgbClr val="6B6965"/>
+                  <a:srgbClr val="6D7A6F"/>
                 </a:solidFill>
                 <a:latin typeface="Malgun Gothic" pitchFamily="34" charset="0"/>
                 <a:ea typeface="Malgun Gothic" pitchFamily="34" charset="-122"/>
@@ -4365,7 +4475,7 @@
             <a:r>
               <a:rPr lang="en-US" sz="1450" dirty="0">
                 <a:solidFill>
-                  <a:srgbClr val="6B6965"/>
+                  <a:srgbClr val="6D7A6F"/>
                 </a:solidFill>
                 <a:latin typeface="Malgun Gothic" pitchFamily="34" charset="0"/>
                 <a:ea typeface="Malgun Gothic" pitchFamily="34" charset="-122"/>
@@ -4404,13 +4514,30 @@
             <a:r>
               <a:rPr lang="en-US" sz="2200" b="1" dirty="0">
                 <a:solidFill>
-                  <a:srgbClr val="004E36"/>
-                </a:solidFill>
-                <a:latin typeface="Malgun Gothic" pitchFamily="34" charset="0"/>
-                <a:ea typeface="Malgun Gothic" pitchFamily="34" charset="-122"/>
-                <a:cs typeface="Malgun Gothic" pitchFamily="34" charset="-120"/>
-              </a:rPr>
-              <a:t>입력할 날짜  0개</a:t>
+                  <a:srgbClr val="17251C"/>
+                </a:solidFill>
+                <a:latin typeface="Malgun Gothic" pitchFamily="34" charset="0"/>
+                <a:ea typeface="Malgun Gothic" pitchFamily="34" charset="-122"/>
+                <a:cs typeface="Malgun Gothic" pitchFamily="34" charset="-120"/>
+              </a:rPr>
+              <a:t>입력할 날짜 </a:t>
+            </a:r>
+            <a:pPr indent="0" marL="0">
+              <a:buNone/>
+            </a:pPr>
+            <a:r>
+              <a:rPr lang="en-US" sz="2200" b="1" dirty="0">
+                <a:solidFill>
+                  <a:srgbClr val="14300A"/>
+                </a:solidFill>
+                <a:highlight>
+                  <a:srgbClr val="5BD41E"/>
+                </a:highlight>
+                <a:latin typeface="Malgun Gothic" pitchFamily="34" charset="0"/>
+                <a:ea typeface="Malgun Gothic" pitchFamily="34" charset="-122"/>
+                <a:cs typeface="Malgun Gothic" pitchFamily="34" charset="-120"/>
+              </a:rPr>
+              <a:t> 0개 </a:t>
             </a:r>
             <a:endParaRPr lang="en-US" sz="2200" dirty="0"/>
           </a:p>
@@ -4443,7 +4570,7 @@
             <a:r>
               <a:rPr lang="en-US" sz="1200" dirty="0">
                 <a:solidFill>
-                  <a:srgbClr val="6B6965"/>
+                  <a:srgbClr val="6D7A6F"/>
                 </a:solidFill>
                 <a:latin typeface="Malgun Gothic" pitchFamily="34" charset="0"/>
                 <a:ea typeface="Malgun Gothic" pitchFamily="34" charset="-122"/>
@@ -4466,15 +4593,17 @@
             <a:off x="5029200" y="914400"/>
             <a:ext cx="3566160" cy="3657600"/>
           </a:xfrm>
-          <a:prstGeom prst="rect">
-            <a:avLst/>
+          <a:prstGeom prst="roundRect">
+            <a:avLst>
+              <a:gd name="adj" fmla="val 2564"/>
+            </a:avLst>
           </a:prstGeom>
           <a:solidFill>
             <a:srgbClr val="FFFFFF"/>
           </a:solidFill>
           <a:ln w="19050">
             <a:solidFill>
-              <a:srgbClr val="D9D7D3"/>
+              <a:srgbClr val="E3ECDA"/>
             </a:solidFill>
             <a:prstDash val="solid"/>
           </a:ln>
@@ -4507,7 +4636,7 @@
             <a:r>
               <a:rPr lang="en-US" sz="1300" b="1" dirty="0">
                 <a:solidFill>
-                  <a:srgbClr val="2E2D2B"/>
+                  <a:srgbClr val="17251C"/>
                 </a:solidFill>
                 <a:latin typeface="Malgun Gothic" pitchFamily="34" charset="0"/>
                 <a:ea typeface="Malgun Gothic" pitchFamily="34" charset="-122"/>
@@ -4530,18 +4659,15 @@
             <a:off x="5303520" y="1508760"/>
             <a:ext cx="3017520" cy="411480"/>
           </a:xfrm>
-          <a:prstGeom prst="rect">
-            <a:avLst/>
+          <a:prstGeom prst="roundRect">
+            <a:avLst>
+              <a:gd name="adj" fmla="val 13333"/>
+            </a:avLst>
           </a:prstGeom>
           <a:solidFill>
-            <a:srgbClr val="FFFFFF"/>
+            <a:srgbClr val="F1F6EC"/>
           </a:solidFill>
-          <a:ln w="12700">
-            <a:solidFill>
-              <a:srgbClr val="D9D7D3"/>
-            </a:solidFill>
-            <a:prstDash val="solid"/>
-          </a:ln>
+          <a:ln/>
         </p:spPr>
       </p:sp>
       <p:sp>
@@ -4569,9 +4695,9 @@
               <a:buNone/>
             </a:pPr>
             <a:r>
-              <a:rPr lang="en-US" sz="1250" dirty="0">
-                <a:solidFill>
-                  <a:srgbClr val="2E2D2B"/>
+              <a:rPr lang="en-US" sz="1250" b="1" dirty="0">
+                <a:solidFill>
+                  <a:srgbClr val="17251C"/>
                 </a:solidFill>
                 <a:latin typeface="Malgun Gothic" pitchFamily="34" charset="0"/>
                 <a:ea typeface="Malgun Gothic" pitchFamily="34" charset="-122"/>
@@ -4594,18 +4720,15 @@
             <a:off x="5303520" y="2011680"/>
             <a:ext cx="3017520" cy="457200"/>
           </a:xfrm>
-          <a:prstGeom prst="rect">
-            <a:avLst/>
+          <a:prstGeom prst="roundRect">
+            <a:avLst>
+              <a:gd name="adj" fmla="val 12000"/>
+            </a:avLst>
           </a:prstGeom>
           <a:solidFill>
-            <a:srgbClr val="E7EFEA"/>
+            <a:srgbClr val="E7F9D7"/>
           </a:solidFill>
-          <a:ln w="12700">
-            <a:solidFill>
-              <a:srgbClr val="004E36"/>
-            </a:solidFill>
-            <a:prstDash val="solid"/>
-          </a:ln>
+          <a:ln/>
         </p:spPr>
       </p:sp>
       <p:sp>
@@ -4635,7 +4758,7 @@
             <a:r>
               <a:rPr lang="en-US" sz="1150" b="1" dirty="0">
                 <a:solidFill>
-                  <a:srgbClr val="004E36"/>
+                  <a:srgbClr val="2F9E14"/>
                 </a:solidFill>
                 <a:latin typeface="Malgun Gothic" pitchFamily="34" charset="0"/>
                 <a:ea typeface="Malgun Gothic" pitchFamily="34" charset="-122"/>
@@ -4658,18 +4781,15 @@
             <a:off x="5303520" y="2651760"/>
             <a:ext cx="950976" cy="384048"/>
           </a:xfrm>
-          <a:prstGeom prst="rect">
-            <a:avLst/>
+          <a:prstGeom prst="roundRect">
+            <a:avLst>
+              <a:gd name="adj" fmla="val 14286"/>
+            </a:avLst>
           </a:prstGeom>
           <a:solidFill>
-            <a:srgbClr val="FFFFFF"/>
+            <a:srgbClr val="F1F6EC"/>
           </a:solidFill>
-          <a:ln w="12700">
-            <a:solidFill>
-              <a:srgbClr val="D9D7D3"/>
-            </a:solidFill>
-            <a:prstDash val="solid"/>
-          </a:ln>
+          <a:ln/>
         </p:spPr>
       </p:sp>
       <p:sp>
@@ -4699,7 +4819,7 @@
             <a:r>
               <a:rPr lang="en-US" sz="1050" dirty="0">
                 <a:solidFill>
-                  <a:srgbClr val="6B6965"/>
+                  <a:srgbClr val="6D7A6F"/>
                 </a:solidFill>
                 <a:latin typeface="Malgun Gothic" pitchFamily="34" charset="0"/>
                 <a:ea typeface="Malgun Gothic" pitchFamily="34" charset="-122"/>
@@ -4722,18 +4842,15 @@
             <a:off x="6336792" y="2651760"/>
             <a:ext cx="950976" cy="384048"/>
           </a:xfrm>
-          <a:prstGeom prst="rect">
-            <a:avLst/>
+          <a:prstGeom prst="roundRect">
+            <a:avLst>
+              <a:gd name="adj" fmla="val 14286"/>
+            </a:avLst>
           </a:prstGeom>
           <a:solidFill>
-            <a:srgbClr val="004E36"/>
+            <a:srgbClr val="5BD41E"/>
           </a:solidFill>
-          <a:ln w="12700">
-            <a:solidFill>
-              <a:srgbClr val="004E36"/>
-            </a:solidFill>
-            <a:prstDash val="solid"/>
-          </a:ln>
+          <a:ln/>
         </p:spPr>
       </p:sp>
       <p:sp>
@@ -4763,7 +4880,7 @@
             <a:r>
               <a:rPr lang="en-US" sz="1050" b="1" dirty="0">
                 <a:solidFill>
-                  <a:srgbClr val="FFFFFF"/>
+                  <a:srgbClr val="14300A"/>
                 </a:solidFill>
                 <a:latin typeface="Malgun Gothic" pitchFamily="34" charset="0"/>
                 <a:ea typeface="Malgun Gothic" pitchFamily="34" charset="-122"/>
@@ -4786,18 +4903,15 @@
             <a:off x="7370064" y="2651760"/>
             <a:ext cx="950976" cy="384048"/>
           </a:xfrm>
-          <a:prstGeom prst="rect">
-            <a:avLst/>
+          <a:prstGeom prst="roundRect">
+            <a:avLst>
+              <a:gd name="adj" fmla="val 14286"/>
+            </a:avLst>
           </a:prstGeom>
           <a:solidFill>
-            <a:srgbClr val="FFFFFF"/>
+            <a:srgbClr val="F1F6EC"/>
           </a:solidFill>
-          <a:ln w="12700">
-            <a:solidFill>
-              <a:srgbClr val="D9D7D3"/>
-            </a:solidFill>
-            <a:prstDash val="solid"/>
-          </a:ln>
+          <a:ln/>
         </p:spPr>
       </p:sp>
       <p:sp>
@@ -4827,7 +4941,7 @@
             <a:r>
               <a:rPr lang="en-US" sz="1050" dirty="0">
                 <a:solidFill>
-                  <a:srgbClr val="6B6965"/>
+                  <a:srgbClr val="6D7A6F"/>
                 </a:solidFill>
                 <a:latin typeface="Malgun Gothic" pitchFamily="34" charset="0"/>
                 <a:ea typeface="Malgun Gothic" pitchFamily="34" charset="-122"/>
@@ -4866,7 +4980,7 @@
             <a:r>
               <a:rPr lang="en-US" sz="1100" dirty="0">
                 <a:solidFill>
-                  <a:srgbClr val="6B6965"/>
+                  <a:srgbClr val="6D7A6F"/>
                 </a:solidFill>
                 <a:latin typeface="Malgun Gothic" pitchFamily="34" charset="0"/>
                 <a:ea typeface="Malgun Gothic" pitchFamily="34" charset="-122"/>
@@ -4889,11 +5003,13 @@
             <a:off x="5303520" y="3657600"/>
             <a:ext cx="3017520" cy="502920"/>
           </a:xfrm>
-          <a:prstGeom prst="rect">
-            <a:avLst/>
+          <a:prstGeom prst="roundRect">
+            <a:avLst>
+              <a:gd name="adj" fmla="val 12727"/>
+            </a:avLst>
           </a:prstGeom>
           <a:solidFill>
-            <a:srgbClr val="004E36"/>
+            <a:srgbClr val="5BD41E"/>
           </a:solidFill>
           <a:ln/>
         </p:spPr>
@@ -4925,7 +5041,7 @@
             <a:r>
               <a:rPr lang="en-US" sz="1300" b="1" dirty="0">
                 <a:solidFill>
-                  <a:srgbClr val="FFFFFF"/>
+                  <a:srgbClr val="14300A"/>
                 </a:solidFill>
                 <a:latin typeface="Malgun Gothic" pitchFamily="34" charset="0"/>
                 <a:ea typeface="Malgun Gothic" pitchFamily="34" charset="-122"/>
@@ -4951,7 +5067,7 @@
     <p:bg>
       <p:bgPr>
         <a:solidFill>
-          <a:srgbClr val="FFFFFF"/>
+          <a:srgbClr val="FCFEF9"/>
         </a:solidFill>
       </p:bgPr>
     </p:bg>
@@ -4980,15 +5096,17 @@
             <a:off x="548640" y="1051560"/>
             <a:ext cx="3566160" cy="603504"/>
           </a:xfrm>
-          <a:prstGeom prst="rect">
-            <a:avLst/>
+          <a:prstGeom prst="roundRect">
+            <a:avLst>
+              <a:gd name="adj" fmla="val 10606"/>
+            </a:avLst>
           </a:prstGeom>
           <a:solidFill>
-            <a:srgbClr val="F8F7F5"/>
+            <a:srgbClr val="E7F9D7"/>
           </a:solidFill>
           <a:ln w="15875">
             <a:solidFill>
-              <a:srgbClr val="D9D7D3"/>
+              <a:srgbClr val="E3ECDA"/>
             </a:solidFill>
             <a:prstDash val="solid"/>
           </a:ln>
@@ -5021,7 +5139,7 @@
             <a:r>
               <a:rPr lang="en-US" sz="1300" b="1" dirty="0">
                 <a:solidFill>
-                  <a:srgbClr val="2E2D2B"/>
+                  <a:srgbClr val="17251C"/>
                 </a:solidFill>
                 <a:latin typeface="Malgun Gothic" pitchFamily="34" charset="0"/>
                 <a:ea typeface="Malgun Gothic" pitchFamily="34" charset="-122"/>
@@ -5044,15 +5162,17 @@
             <a:off x="548640" y="1764792"/>
             <a:ext cx="3566160" cy="603504"/>
           </a:xfrm>
-          <a:prstGeom prst="rect">
-            <a:avLst/>
+          <a:prstGeom prst="roundRect">
+            <a:avLst>
+              <a:gd name="adj" fmla="val 10606"/>
+            </a:avLst>
           </a:prstGeom>
           <a:solidFill>
             <a:srgbClr val="FFFFFF"/>
           </a:solidFill>
           <a:ln w="15875">
             <a:solidFill>
-              <a:srgbClr val="D9D7D3"/>
+              <a:srgbClr val="E3ECDA"/>
             </a:solidFill>
             <a:prstDash val="solid"/>
           </a:ln>
@@ -5085,7 +5205,7 @@
             <a:r>
               <a:rPr lang="en-US" sz="1300" b="1" dirty="0">
                 <a:solidFill>
-                  <a:srgbClr val="2E2D2B"/>
+                  <a:srgbClr val="17251C"/>
                 </a:solidFill>
                 <a:latin typeface="Malgun Gothic" pitchFamily="34" charset="0"/>
                 <a:ea typeface="Malgun Gothic" pitchFamily="34" charset="-122"/>
@@ -5108,15 +5228,17 @@
             <a:off x="548640" y="2478024"/>
             <a:ext cx="3566160" cy="603504"/>
           </a:xfrm>
-          <a:prstGeom prst="rect">
-            <a:avLst/>
+          <a:prstGeom prst="roundRect">
+            <a:avLst>
+              <a:gd name="adj" fmla="val 10606"/>
+            </a:avLst>
           </a:prstGeom>
           <a:solidFill>
             <a:srgbClr val="FFFFFF"/>
           </a:solidFill>
           <a:ln w="15875">
             <a:solidFill>
-              <a:srgbClr val="D9D7D3"/>
+              <a:srgbClr val="E3ECDA"/>
             </a:solidFill>
             <a:prstDash val="solid"/>
           </a:ln>
@@ -5149,7 +5271,7 @@
             <a:r>
               <a:rPr lang="en-US" sz="1300" b="1" dirty="0">
                 <a:solidFill>
-                  <a:srgbClr val="2E2D2B"/>
+                  <a:srgbClr val="17251C"/>
                 </a:solidFill>
                 <a:latin typeface="Malgun Gothic" pitchFamily="34" charset="0"/>
                 <a:ea typeface="Malgun Gothic" pitchFamily="34" charset="-122"/>
@@ -5169,14 +5291,16 @@
         </p:nvSpPr>
         <p:spPr>
           <a:xfrm>
-            <a:off x="3246120" y="2633472"/>
-            <a:ext cx="731520" cy="292608"/>
-          </a:xfrm>
-          <a:prstGeom prst="rect">
-            <a:avLst/>
+            <a:off x="3200400" y="2633472"/>
+            <a:ext cx="777240" cy="292608"/>
+          </a:xfrm>
+          <a:prstGeom prst="roundRect">
+            <a:avLst>
+              <a:gd name="adj" fmla="val 50000"/>
+            </a:avLst>
           </a:prstGeom>
           <a:solidFill>
-            <a:srgbClr val="B3410F"/>
+            <a:srgbClr val="EF4A25"/>
           </a:solidFill>
           <a:ln/>
         </p:spPr>
@@ -5189,8 +5313,8 @@
         </p:nvSpPr>
         <p:spPr>
           <a:xfrm>
-            <a:off x="3246120" y="2633472"/>
-            <a:ext cx="731520" cy="292608"/>
+            <a:off x="3200400" y="2633472"/>
+            <a:ext cx="777240" cy="292608"/>
           </a:xfrm>
           <a:prstGeom prst="rect">
             <a:avLst/>
@@ -5231,15 +5355,17 @@
             <a:off x="548640" y="3191256"/>
             <a:ext cx="3566160" cy="603504"/>
           </a:xfrm>
-          <a:prstGeom prst="rect">
-            <a:avLst/>
+          <a:prstGeom prst="roundRect">
+            <a:avLst>
+              <a:gd name="adj" fmla="val 10606"/>
+            </a:avLst>
           </a:prstGeom>
           <a:solidFill>
             <a:srgbClr val="FFFFFF"/>
           </a:solidFill>
           <a:ln w="15875">
             <a:solidFill>
-              <a:srgbClr val="D9D7D3"/>
+              <a:srgbClr val="E3ECDA"/>
             </a:solidFill>
             <a:prstDash val="solid"/>
           </a:ln>
@@ -5272,7 +5398,7 @@
             <a:r>
               <a:rPr lang="en-US" sz="1300" b="1" dirty="0">
                 <a:solidFill>
-                  <a:srgbClr val="2E2D2B"/>
+                  <a:srgbClr val="17251C"/>
                 </a:solidFill>
                 <a:latin typeface="Malgun Gothic" pitchFamily="34" charset="0"/>
                 <a:ea typeface="Malgun Gothic" pitchFamily="34" charset="-122"/>
@@ -5295,15 +5421,17 @@
             <a:off x="548640" y="3904488"/>
             <a:ext cx="3566160" cy="603504"/>
           </a:xfrm>
-          <a:prstGeom prst="rect">
-            <a:avLst/>
+          <a:prstGeom prst="roundRect">
+            <a:avLst>
+              <a:gd name="adj" fmla="val 10606"/>
+            </a:avLst>
           </a:prstGeom>
           <a:solidFill>
             <a:srgbClr val="FFFFFF"/>
           </a:solidFill>
           <a:ln w="15875">
             <a:solidFill>
-              <a:srgbClr val="D9D7D3"/>
+              <a:srgbClr val="E3ECDA"/>
             </a:solidFill>
             <a:prstDash val="solid"/>
           </a:ln>
@@ -5336,7 +5464,7 @@
             <a:r>
               <a:rPr lang="en-US" sz="1300" b="1" dirty="0">
                 <a:solidFill>
-                  <a:srgbClr val="2E2D2B"/>
+                  <a:srgbClr val="17251C"/>
                 </a:solidFill>
                 <a:latin typeface="Malgun Gothic" pitchFamily="34" charset="0"/>
                 <a:ea typeface="Malgun Gothic" pitchFamily="34" charset="-122"/>
@@ -5356,14 +5484,16 @@
         </p:nvSpPr>
         <p:spPr>
           <a:xfrm>
-            <a:off x="3246120" y="4059936"/>
-            <a:ext cx="731520" cy="292608"/>
-          </a:xfrm>
-          <a:prstGeom prst="rect">
-            <a:avLst/>
+            <a:off x="3200400" y="4059936"/>
+            <a:ext cx="777240" cy="292608"/>
+          </a:xfrm>
+          <a:prstGeom prst="roundRect">
+            <a:avLst>
+              <a:gd name="adj" fmla="val 50000"/>
+            </a:avLst>
           </a:prstGeom>
           <a:solidFill>
-            <a:srgbClr val="B3410F"/>
+            <a:srgbClr val="EF4A25"/>
           </a:solidFill>
           <a:ln/>
         </p:spPr>
@@ -5376,8 +5506,8 @@
         </p:nvSpPr>
         <p:spPr>
           <a:xfrm>
-            <a:off x="3246120" y="4059936"/>
-            <a:ext cx="731520" cy="292608"/>
+            <a:off x="3200400" y="4059936"/>
+            <a:ext cx="777240" cy="292608"/>
           </a:xfrm>
           <a:prstGeom prst="rect">
             <a:avLst/>
@@ -5434,7 +5564,7 @@
             <a:r>
               <a:rPr lang="en-US" sz="1100" b="1" spc="300" kern="0" dirty="0">
                 <a:solidFill>
-                  <a:srgbClr val="004E36"/>
+                  <a:srgbClr val="2F9E14"/>
                 </a:solidFill>
                 <a:latin typeface="Malgun Gothic" pitchFamily="34" charset="0"/>
                 <a:ea typeface="Malgun Gothic" pitchFamily="34" charset="-122"/>
@@ -5473,7 +5603,7 @@
             <a:r>
               <a:rPr lang="en-US" sz="2500" b="1" dirty="0">
                 <a:solidFill>
-                  <a:srgbClr val="2E2D2B"/>
+                  <a:srgbClr val="17251C"/>
                 </a:solidFill>
                 <a:latin typeface="Malgun Gothic" pitchFamily="34" charset="0"/>
                 <a:ea typeface="Malgun Gothic" pitchFamily="34" charset="-122"/>
@@ -5512,7 +5642,7 @@
             <a:r>
               <a:rPr lang="en-US" sz="1450" dirty="0">
                 <a:solidFill>
-                  <a:srgbClr val="6B6965"/>
+                  <a:srgbClr val="6D7A6F"/>
                 </a:solidFill>
                 <a:latin typeface="Malgun Gothic" pitchFamily="34" charset="0"/>
                 <a:ea typeface="Malgun Gothic" pitchFamily="34" charset="-122"/>
@@ -5529,7 +5659,7 @@
             <a:r>
               <a:rPr lang="en-US" sz="1450" dirty="0">
                 <a:solidFill>
-                  <a:srgbClr val="6B6965"/>
+                  <a:srgbClr val="6D7A6F"/>
                 </a:solidFill>
                 <a:latin typeface="Malgun Gothic" pitchFamily="34" charset="0"/>
                 <a:ea typeface="Malgun Gothic" pitchFamily="34" charset="-122"/>
@@ -5546,7 +5676,7 @@
             <a:r>
               <a:rPr lang="en-US" sz="1450" dirty="0">
                 <a:solidFill>
-                  <a:srgbClr val="6B6965"/>
+                  <a:srgbClr val="6D7A6F"/>
                 </a:solidFill>
                 <a:latin typeface="Malgun Gothic" pitchFamily="34" charset="0"/>
                 <a:ea typeface="Malgun Gothic" pitchFamily="34" charset="-122"/>
@@ -5585,7 +5715,7 @@
             <a:r>
               <a:rPr lang="en-US" sz="1450" b="1" dirty="0">
                 <a:solidFill>
-                  <a:srgbClr val="004E36"/>
+                  <a:srgbClr val="2F9E14"/>
                 </a:solidFill>
                 <a:latin typeface="Malgun Gothic" pitchFamily="34" charset="0"/>
                 <a:ea typeface="Malgun Gothic" pitchFamily="34" charset="-122"/>
@@ -5602,7 +5732,7 @@
             <a:r>
               <a:rPr lang="en-US" sz="1450" b="1" dirty="0">
                 <a:solidFill>
-                  <a:srgbClr val="004E36"/>
+                  <a:srgbClr val="2F9E14"/>
                 </a:solidFill>
                 <a:latin typeface="Malgun Gothic" pitchFamily="34" charset="0"/>
                 <a:ea typeface="Malgun Gothic" pitchFamily="34" charset="-122"/>
@@ -5628,7 +5758,7 @@
     <p:bg>
       <p:bgPr>
         <a:solidFill>
-          <a:srgbClr val="FFFFFF"/>
+          <a:srgbClr val="FCFEF9"/>
         </a:solidFill>
       </p:bgPr>
     </p:bg>
@@ -5673,7 +5803,7 @@
             <a:r>
               <a:rPr lang="en-US" sz="1100" b="1" spc="300" kern="0" dirty="0">
                 <a:solidFill>
-                  <a:srgbClr val="004E36"/>
+                  <a:srgbClr val="2F9E14"/>
                 </a:solidFill>
                 <a:latin typeface="Malgun Gothic" pitchFamily="34" charset="0"/>
                 <a:ea typeface="Malgun Gothic" pitchFamily="34" charset="-122"/>
@@ -5712,7 +5842,7 @@
             <a:r>
               <a:rPr lang="en-US" sz="2500" b="1" dirty="0">
                 <a:solidFill>
-                  <a:srgbClr val="2E2D2B"/>
+                  <a:srgbClr val="17251C"/>
                 </a:solidFill>
                 <a:latin typeface="Malgun Gothic" pitchFamily="34" charset="0"/>
                 <a:ea typeface="Malgun Gothic" pitchFamily="34" charset="-122"/>
@@ -5751,7 +5881,7 @@
             <a:r>
               <a:rPr lang="en-US" sz="1450" dirty="0">
                 <a:solidFill>
-                  <a:srgbClr val="6B6965"/>
+                  <a:srgbClr val="6D7A6F"/>
                 </a:solidFill>
                 <a:latin typeface="Malgun Gothic" pitchFamily="34" charset="0"/>
                 <a:ea typeface="Malgun Gothic" pitchFamily="34" charset="-122"/>
@@ -5768,7 +5898,7 @@
             <a:r>
               <a:rPr lang="en-US" sz="1450" dirty="0">
                 <a:solidFill>
-                  <a:srgbClr val="6B6965"/>
+                  <a:srgbClr val="6D7A6F"/>
                 </a:solidFill>
                 <a:latin typeface="Malgun Gothic" pitchFamily="34" charset="0"/>
                 <a:ea typeface="Malgun Gothic" pitchFamily="34" charset="-122"/>
@@ -5807,7 +5937,7 @@
             <a:r>
               <a:rPr lang="en-US" sz="1450" b="1" dirty="0">
                 <a:solidFill>
-                  <a:srgbClr val="004E36"/>
+                  <a:srgbClr val="2F9E14"/>
                 </a:solidFill>
                 <a:latin typeface="Malgun Gothic" pitchFamily="34" charset="0"/>
                 <a:ea typeface="Malgun Gothic" pitchFamily="34" charset="-122"/>
@@ -5824,7 +5954,7 @@
             <a:r>
               <a:rPr lang="en-US" sz="1450" b="1" dirty="0">
                 <a:solidFill>
-                  <a:srgbClr val="004E36"/>
+                  <a:srgbClr val="2F9E14"/>
                 </a:solidFill>
                 <a:latin typeface="Malgun Gothic" pitchFamily="34" charset="0"/>
                 <a:ea typeface="Malgun Gothic" pitchFamily="34" charset="-122"/>
@@ -5841,7 +5971,7 @@
             <a:r>
               <a:rPr lang="en-US" sz="1450" b="1" dirty="0">
                 <a:solidFill>
-                  <a:srgbClr val="004E36"/>
+                  <a:srgbClr val="2F9E14"/>
                 </a:solidFill>
                 <a:latin typeface="Malgun Gothic" pitchFamily="34" charset="0"/>
                 <a:ea typeface="Malgun Gothic" pitchFamily="34" charset="-122"/>
@@ -5864,15 +5994,466 @@
             <a:off x="4846320" y="1005840"/>
             <a:ext cx="3749040" cy="1691640"/>
           </a:xfrm>
-          <a:prstGeom prst="rect">
-            <a:avLst/>
+          <a:prstGeom prst="roundRect">
+            <a:avLst>
+              <a:gd name="adj" fmla="val 5405"/>
+            </a:avLst>
+          </a:prstGeom>
+          <a:solidFill>
+            <a:srgbClr val="FFE4DB"/>
+          </a:solidFill>
+          <a:ln/>
+        </p:spPr>
+      </p:sp>
+      <p:sp>
+        <p:nvSpPr>
+          <p:cNvPr id="7" name="Text 5"/>
+          <p:cNvSpPr/>
+          <p:nvPr/>
+        </p:nvSpPr>
+        <p:spPr>
+          <a:xfrm>
+            <a:off x="5074920" y="1188720"/>
+            <a:ext cx="1371600" cy="365760"/>
+          </a:xfrm>
+          <a:prstGeom prst="rect">
+            <a:avLst/>
+          </a:prstGeom>
+          <a:noFill/>
+          <a:ln/>
+        </p:spPr>
+        <p:txBody>
+          <a:bodyPr wrap="square" lIns="0" tIns="0" rIns="0" bIns="0" rtlCol="0" anchor="ctr"/>
+          <a:lstStyle/>
+          <a:p>
+            <a:pPr indent="0" marL="0">
+              <a:buNone/>
+            </a:pPr>
+            <a:r>
+              <a:rPr lang="en-US" sz="1500" b="1" dirty="0">
+                <a:solidFill>
+                  <a:srgbClr val="17251C"/>
+                </a:solidFill>
+                <a:latin typeface="Malgun Gothic" pitchFamily="34" charset="0"/>
+                <a:ea typeface="Malgun Gothic" pitchFamily="34" charset="-122"/>
+                <a:cs typeface="Malgun Gothic" pitchFamily="34" charset="-120"/>
+              </a:rPr>
+              <a:t>애호박</a:t>
+            </a:r>
+            <a:endParaRPr lang="en-US" sz="1500" dirty="0"/>
+          </a:p>
+        </p:txBody>
+      </p:sp>
+      <p:sp>
+        <p:nvSpPr>
+          <p:cNvPr id="8" name="Shape 6"/>
+          <p:cNvSpPr/>
+          <p:nvPr/>
+        </p:nvSpPr>
+        <p:spPr>
+          <a:xfrm>
+            <a:off x="6035040" y="1216152"/>
+            <a:ext cx="777240" cy="310896"/>
+          </a:xfrm>
+          <a:prstGeom prst="roundRect">
+            <a:avLst>
+              <a:gd name="adj" fmla="val 47059"/>
+            </a:avLst>
+          </a:prstGeom>
+          <a:solidFill>
+            <a:srgbClr val="FFFFFF"/>
+          </a:solidFill>
+          <a:ln/>
+        </p:spPr>
+      </p:sp>
+      <p:sp>
+        <p:nvSpPr>
+          <p:cNvPr id="9" name="Text 7"/>
+          <p:cNvSpPr/>
+          <p:nvPr/>
+        </p:nvSpPr>
+        <p:spPr>
+          <a:xfrm>
+            <a:off x="6035040" y="1216152"/>
+            <a:ext cx="777240" cy="310896"/>
+          </a:xfrm>
+          <a:prstGeom prst="rect">
+            <a:avLst/>
+          </a:prstGeom>
+          <a:noFill/>
+          <a:ln/>
+        </p:spPr>
+        <p:txBody>
+          <a:bodyPr wrap="square" lIns="0" tIns="0" rIns="0" bIns="0" rtlCol="0" anchor="ctr"/>
+          <a:lstStyle/>
+          <a:p>
+            <a:pPr algn="ctr" indent="0" marL="0">
+              <a:buNone/>
+            </a:pPr>
+            <a:r>
+              <a:rPr lang="en-US" sz="1000" dirty="0">
+                <a:solidFill>
+                  <a:srgbClr val="6D7A6F"/>
+                </a:solidFill>
+                <a:latin typeface="Malgun Gothic" pitchFamily="34" charset="0"/>
+                <a:ea typeface="Malgun Gothic" pitchFamily="34" charset="-122"/>
+                <a:cs typeface="Malgun Gothic" pitchFamily="34" charset="-120"/>
+              </a:rPr>
+              <a:t>야채칸</a:t>
+            </a:r>
+            <a:endParaRPr lang="en-US" sz="1000" dirty="0"/>
+          </a:p>
+        </p:txBody>
+      </p:sp>
+      <p:sp>
+        <p:nvSpPr>
+          <p:cNvPr id="10" name="Shape 8"/>
+          <p:cNvSpPr/>
+          <p:nvPr/>
+        </p:nvSpPr>
+        <p:spPr>
+          <a:xfrm>
+            <a:off x="7772400" y="1216152"/>
+            <a:ext cx="594360" cy="310896"/>
+          </a:xfrm>
+          <a:prstGeom prst="roundRect">
+            <a:avLst>
+              <a:gd name="adj" fmla="val 47059"/>
+            </a:avLst>
+          </a:prstGeom>
+          <a:solidFill>
+            <a:srgbClr val="EF4A25"/>
+          </a:solidFill>
+          <a:ln/>
+        </p:spPr>
+      </p:sp>
+      <p:sp>
+        <p:nvSpPr>
+          <p:cNvPr id="11" name="Text 9"/>
+          <p:cNvSpPr/>
+          <p:nvPr/>
+        </p:nvSpPr>
+        <p:spPr>
+          <a:xfrm>
+            <a:off x="7772400" y="1216152"/>
+            <a:ext cx="594360" cy="310896"/>
+          </a:xfrm>
+          <a:prstGeom prst="rect">
+            <a:avLst/>
+          </a:prstGeom>
+          <a:noFill/>
+          <a:ln/>
+        </p:spPr>
+        <p:txBody>
+          <a:bodyPr wrap="square" lIns="0" tIns="0" rIns="0" bIns="0" rtlCol="0" anchor="ctr"/>
+          <a:lstStyle/>
+          <a:p>
+            <a:pPr algn="ctr" indent="0" marL="0">
+              <a:buNone/>
+            </a:pPr>
+            <a:r>
+              <a:rPr lang="en-US" sz="1050" b="1" dirty="0">
+                <a:solidFill>
+                  <a:srgbClr val="FFFFFF"/>
+                </a:solidFill>
+                <a:latin typeface="Malgun Gothic" pitchFamily="34" charset="0"/>
+                <a:ea typeface="Malgun Gothic" pitchFamily="34" charset="-122"/>
+                <a:cs typeface="Malgun Gothic" pitchFamily="34" charset="-120"/>
+              </a:rPr>
+              <a:t>D-1</a:t>
+            </a:r>
+            <a:endParaRPr lang="en-US" sz="1050" dirty="0"/>
+          </a:p>
+        </p:txBody>
+      </p:sp>
+      <p:sp>
+        <p:nvSpPr>
+          <p:cNvPr id="12" name="Shape 10"/>
+          <p:cNvSpPr/>
+          <p:nvPr/>
+        </p:nvSpPr>
+        <p:spPr>
+          <a:xfrm>
+            <a:off x="5074920" y="2057400"/>
+            <a:ext cx="1051560" cy="457200"/>
+          </a:xfrm>
+          <a:prstGeom prst="roundRect">
+            <a:avLst>
+              <a:gd name="adj" fmla="val 16000"/>
+            </a:avLst>
+          </a:prstGeom>
+          <a:solidFill>
+            <a:srgbClr val="5BD41E"/>
+          </a:solidFill>
+          <a:ln/>
+        </p:spPr>
+      </p:sp>
+      <p:sp>
+        <p:nvSpPr>
+          <p:cNvPr id="13" name="Text 11"/>
+          <p:cNvSpPr/>
+          <p:nvPr/>
+        </p:nvSpPr>
+        <p:spPr>
+          <a:xfrm>
+            <a:off x="5074920" y="2057400"/>
+            <a:ext cx="1051560" cy="457200"/>
+          </a:xfrm>
+          <a:prstGeom prst="rect">
+            <a:avLst/>
+          </a:prstGeom>
+          <a:noFill/>
+          <a:ln/>
+        </p:spPr>
+        <p:txBody>
+          <a:bodyPr wrap="square" lIns="0" tIns="0" rIns="0" bIns="0" rtlCol="0" anchor="ctr"/>
+          <a:lstStyle/>
+          <a:p>
+            <a:pPr algn="ctr" indent="0" marL="0">
+              <a:buNone/>
+            </a:pPr>
+            <a:r>
+              <a:rPr lang="en-US" sz="1100" b="1" dirty="0">
+                <a:solidFill>
+                  <a:srgbClr val="14300A"/>
+                </a:solidFill>
+                <a:latin typeface="Malgun Gothic" pitchFamily="34" charset="0"/>
+                <a:ea typeface="Malgun Gothic" pitchFamily="34" charset="-122"/>
+                <a:cs typeface="Malgun Gothic" pitchFamily="34" charset="-120"/>
+              </a:rPr>
+              <a:t>오늘 먹기</a:t>
+            </a:r>
+            <a:endParaRPr lang="en-US" sz="1100" dirty="0"/>
+          </a:p>
+        </p:txBody>
+      </p:sp>
+      <p:sp>
+        <p:nvSpPr>
+          <p:cNvPr id="14" name="Shape 12"/>
+          <p:cNvSpPr/>
+          <p:nvPr/>
+        </p:nvSpPr>
+        <p:spPr>
+          <a:xfrm>
+            <a:off x="6217920" y="2057400"/>
+            <a:ext cx="1051560" cy="457200"/>
+          </a:xfrm>
+          <a:prstGeom prst="roundRect">
+            <a:avLst>
+              <a:gd name="adj" fmla="val 16000"/>
+            </a:avLst>
+          </a:prstGeom>
+          <a:solidFill>
+            <a:srgbClr val="FFFFFF"/>
+          </a:solidFill>
+          <a:ln/>
+        </p:spPr>
+      </p:sp>
+      <p:sp>
+        <p:nvSpPr>
+          <p:cNvPr id="15" name="Text 13"/>
+          <p:cNvSpPr/>
+          <p:nvPr/>
+        </p:nvSpPr>
+        <p:spPr>
+          <a:xfrm>
+            <a:off x="6217920" y="2057400"/>
+            <a:ext cx="1051560" cy="457200"/>
+          </a:xfrm>
+          <a:prstGeom prst="rect">
+            <a:avLst/>
+          </a:prstGeom>
+          <a:noFill/>
+          <a:ln/>
+        </p:spPr>
+        <p:txBody>
+          <a:bodyPr wrap="square" lIns="0" tIns="0" rIns="0" bIns="0" rtlCol="0" anchor="ctr"/>
+          <a:lstStyle/>
+          <a:p>
+            <a:pPr algn="ctr" indent="0" marL="0">
+              <a:buNone/>
+            </a:pPr>
+            <a:r>
+              <a:rPr lang="en-US" sz="1100" b="1" dirty="0">
+                <a:solidFill>
+                  <a:srgbClr val="17251C"/>
+                </a:solidFill>
+                <a:latin typeface="Malgun Gothic" pitchFamily="34" charset="0"/>
+                <a:ea typeface="Malgun Gothic" pitchFamily="34" charset="-122"/>
+                <a:cs typeface="Malgun Gothic" pitchFamily="34" charset="-120"/>
+              </a:rPr>
+              <a:t>냉동하기</a:t>
+            </a:r>
+            <a:endParaRPr lang="en-US" sz="1100" dirty="0"/>
+          </a:p>
+        </p:txBody>
+      </p:sp>
+      <p:sp>
+        <p:nvSpPr>
+          <p:cNvPr id="16" name="Shape 14"/>
+          <p:cNvSpPr/>
+          <p:nvPr/>
+        </p:nvSpPr>
+        <p:spPr>
+          <a:xfrm>
+            <a:off x="7360920" y="2057400"/>
+            <a:ext cx="1051560" cy="457200"/>
+          </a:xfrm>
+          <a:prstGeom prst="roundRect">
+            <a:avLst>
+              <a:gd name="adj" fmla="val 16000"/>
+            </a:avLst>
+          </a:prstGeom>
+          <a:solidFill>
+            <a:srgbClr val="FFFFFF"/>
+          </a:solidFill>
+          <a:ln/>
+        </p:spPr>
+      </p:sp>
+      <p:sp>
+        <p:nvSpPr>
+          <p:cNvPr id="17" name="Text 15"/>
+          <p:cNvSpPr/>
+          <p:nvPr/>
+        </p:nvSpPr>
+        <p:spPr>
+          <a:xfrm>
+            <a:off x="7360920" y="2057400"/>
+            <a:ext cx="1051560" cy="457200"/>
+          </a:xfrm>
+          <a:prstGeom prst="rect">
+            <a:avLst/>
+          </a:prstGeom>
+          <a:noFill/>
+          <a:ln/>
+        </p:spPr>
+        <p:txBody>
+          <a:bodyPr wrap="square" lIns="0" tIns="0" rIns="0" bIns="0" rtlCol="0" anchor="ctr"/>
+          <a:lstStyle/>
+          <a:p>
+            <a:pPr algn="ctr" indent="0" marL="0">
+              <a:buNone/>
+            </a:pPr>
+            <a:r>
+              <a:rPr lang="en-US" sz="1100" b="1" dirty="0">
+                <a:solidFill>
+                  <a:srgbClr val="17251C"/>
+                </a:solidFill>
+                <a:latin typeface="Malgun Gothic" pitchFamily="34" charset="0"/>
+                <a:ea typeface="Malgun Gothic" pitchFamily="34" charset="-122"/>
+                <a:cs typeface="Malgun Gothic" pitchFamily="34" charset="-120"/>
+              </a:rPr>
+              <a:t>손질하기</a:t>
+            </a:r>
+            <a:endParaRPr lang="en-US" sz="1100" dirty="0"/>
+          </a:p>
+        </p:txBody>
+      </p:sp>
+      <p:sp>
+        <p:nvSpPr>
+          <p:cNvPr id="18" name="Shape 16"/>
+          <p:cNvSpPr/>
+          <p:nvPr/>
+        </p:nvSpPr>
+        <p:spPr>
+          <a:xfrm>
+            <a:off x="4846320" y="2971800"/>
+            <a:ext cx="3749040" cy="1371600"/>
+          </a:xfrm>
+          <a:prstGeom prst="roundRect">
+            <a:avLst>
+              <a:gd name="adj" fmla="val 6667"/>
+            </a:avLst>
+          </a:prstGeom>
+          <a:solidFill>
+            <a:srgbClr val="FFFFFF"/>
+          </a:solidFill>
+          <a:ln w="12700">
+            <a:solidFill>
+              <a:srgbClr val="E3ECDA"/>
+            </a:solidFill>
+            <a:prstDash val="solid"/>
+          </a:ln>
+        </p:spPr>
+      </p:sp>
+      <p:sp>
+        <p:nvSpPr>
+          <p:cNvPr id="19" name="Text 17"/>
+          <p:cNvSpPr/>
+          <p:nvPr/>
+        </p:nvSpPr>
+        <p:spPr>
+          <a:xfrm>
+            <a:off x="5074920" y="3127248"/>
+            <a:ext cx="3291840" cy="365760"/>
+          </a:xfrm>
+          <a:prstGeom prst="rect">
+            <a:avLst/>
+          </a:prstGeom>
+          <a:noFill/>
+          <a:ln/>
+        </p:spPr>
+        <p:txBody>
+          <a:bodyPr wrap="square" lIns="0" tIns="0" rIns="0" bIns="0" rtlCol="0" anchor="ctr"/>
+          <a:lstStyle/>
+          <a:p>
+            <a:pPr indent="0" marL="0">
+              <a:buNone/>
+            </a:pPr>
+            <a:r>
+              <a:rPr lang="en-US" sz="1300" b="1" dirty="0">
+                <a:solidFill>
+                  <a:srgbClr val="17251C"/>
+                </a:solidFill>
+                <a:latin typeface="Malgun Gothic" pitchFamily="34" charset="0"/>
+                <a:ea typeface="Malgun Gothic" pitchFamily="34" charset="-122"/>
+                <a:cs typeface="Malgun Gothic" pitchFamily="34" charset="-120"/>
+              </a:rPr>
+              <a:t>대파  </a:t>
+            </a:r>
+            <a:pPr indent="0" marL="0">
+              <a:buNone/>
+            </a:pPr>
+            <a:r>
+              <a:rPr lang="en-US" sz="1300" b="1" dirty="0">
+                <a:solidFill>
+                  <a:srgbClr val="FFFFFF"/>
+                </a:solidFill>
+                <a:highlight>
+                  <a:srgbClr val="EF4A25"/>
+                </a:highlight>
+                <a:latin typeface="Malgun Gothic" pitchFamily="34" charset="0"/>
+                <a:ea typeface="Malgun Gothic" pitchFamily="34" charset="-122"/>
+                <a:cs typeface="Malgun Gothic" pitchFamily="34" charset="-120"/>
+              </a:rPr>
+              <a:t> +2일 지남 </a:t>
+            </a:r>
+            <a:endParaRPr lang="en-US" sz="1300" dirty="0"/>
+          </a:p>
+        </p:txBody>
+      </p:sp>
+      <p:sp>
+        <p:nvSpPr>
+          <p:cNvPr id="20" name="Shape 18"/>
+          <p:cNvSpPr/>
+          <p:nvPr/>
+        </p:nvSpPr>
+        <p:spPr>
+          <a:xfrm>
+            <a:off x="5074920" y="3611880"/>
+            <a:ext cx="3291840" cy="457200"/>
+          </a:xfrm>
+          <a:prstGeom prst="roundRect">
+            <a:avLst>
+              <a:gd name="adj" fmla="val 16000"/>
+            </a:avLst>
           </a:prstGeom>
           <a:solidFill>
             <a:srgbClr val="FFFFFF"/>
           </a:solidFill>
           <a:ln w="19050">
             <a:solidFill>
-              <a:srgbClr val="B3410F"/>
+              <a:srgbClr val="EF4A25"/>
             </a:solidFill>
             <a:prstDash val="solid"/>
           </a:ln>
@@ -5880,442 +6461,7 @@
       </p:sp>
       <p:sp>
         <p:nvSpPr>
-          <p:cNvPr id="7" name="Text 5"/>
-          <p:cNvSpPr/>
-          <p:nvPr/>
-        </p:nvSpPr>
-        <p:spPr>
-          <a:xfrm>
-            <a:off x="5074920" y="1188720"/>
-            <a:ext cx="1371600" cy="365760"/>
-          </a:xfrm>
-          <a:prstGeom prst="rect">
-            <a:avLst/>
-          </a:prstGeom>
-          <a:noFill/>
-          <a:ln/>
-        </p:spPr>
-        <p:txBody>
-          <a:bodyPr wrap="square" lIns="0" tIns="0" rIns="0" bIns="0" rtlCol="0" anchor="ctr"/>
-          <a:lstStyle/>
-          <a:p>
-            <a:pPr indent="0" marL="0">
-              <a:buNone/>
-            </a:pPr>
-            <a:r>
-              <a:rPr lang="en-US" sz="1500" b="1" dirty="0">
-                <a:solidFill>
-                  <a:srgbClr val="2E2D2B"/>
-                </a:solidFill>
-                <a:latin typeface="Malgun Gothic" pitchFamily="34" charset="0"/>
-                <a:ea typeface="Malgun Gothic" pitchFamily="34" charset="-122"/>
-                <a:cs typeface="Malgun Gothic" pitchFamily="34" charset="-120"/>
-              </a:rPr>
-              <a:t>애호박</a:t>
-            </a:r>
-            <a:endParaRPr lang="en-US" sz="1500" dirty="0"/>
-          </a:p>
-        </p:txBody>
-      </p:sp>
-      <p:sp>
-        <p:nvSpPr>
-          <p:cNvPr id="8" name="Shape 6"/>
-          <p:cNvSpPr/>
-          <p:nvPr/>
-        </p:nvSpPr>
-        <p:spPr>
-          <a:xfrm>
-            <a:off x="6035040" y="1216152"/>
-            <a:ext cx="777240" cy="310896"/>
-          </a:xfrm>
-          <a:prstGeom prst="rect">
-            <a:avLst/>
-          </a:prstGeom>
-          <a:solidFill>
-            <a:srgbClr val="F8F7F5"/>
-          </a:solidFill>
-          <a:ln w="12700">
-            <a:solidFill>
-              <a:srgbClr val="D9D7D3"/>
-            </a:solidFill>
-            <a:prstDash val="solid"/>
-          </a:ln>
-        </p:spPr>
-      </p:sp>
-      <p:sp>
-        <p:nvSpPr>
-          <p:cNvPr id="9" name="Text 7"/>
-          <p:cNvSpPr/>
-          <p:nvPr/>
-        </p:nvSpPr>
-        <p:spPr>
-          <a:xfrm>
-            <a:off x="6035040" y="1216152"/>
-            <a:ext cx="777240" cy="310896"/>
-          </a:xfrm>
-          <a:prstGeom prst="rect">
-            <a:avLst/>
-          </a:prstGeom>
-          <a:noFill/>
-          <a:ln/>
-        </p:spPr>
-        <p:txBody>
-          <a:bodyPr wrap="square" lIns="0" tIns="0" rIns="0" bIns="0" rtlCol="0" anchor="ctr"/>
-          <a:lstStyle/>
-          <a:p>
-            <a:pPr algn="ctr" indent="0" marL="0">
-              <a:buNone/>
-            </a:pPr>
-            <a:r>
-              <a:rPr lang="en-US" sz="1000" dirty="0">
-                <a:solidFill>
-                  <a:srgbClr val="6B6965"/>
-                </a:solidFill>
-                <a:latin typeface="Malgun Gothic" pitchFamily="34" charset="0"/>
-                <a:ea typeface="Malgun Gothic" pitchFamily="34" charset="-122"/>
-                <a:cs typeface="Malgun Gothic" pitchFamily="34" charset="-120"/>
-              </a:rPr>
-              <a:t>야채칸</a:t>
-            </a:r>
-            <a:endParaRPr lang="en-US" sz="1000" dirty="0"/>
-          </a:p>
-        </p:txBody>
-      </p:sp>
-      <p:sp>
-        <p:nvSpPr>
-          <p:cNvPr id="10" name="Shape 8"/>
-          <p:cNvSpPr/>
-          <p:nvPr/>
-        </p:nvSpPr>
-        <p:spPr>
-          <a:xfrm>
-            <a:off x="7818120" y="1216152"/>
-            <a:ext cx="548640" cy="310896"/>
-          </a:xfrm>
-          <a:prstGeom prst="rect">
-            <a:avLst/>
-          </a:prstGeom>
-          <a:solidFill>
-            <a:srgbClr val="F7E5DA"/>
-          </a:solidFill>
-          <a:ln/>
-        </p:spPr>
-      </p:sp>
-      <p:sp>
-        <p:nvSpPr>
-          <p:cNvPr id="11" name="Text 9"/>
-          <p:cNvSpPr/>
-          <p:nvPr/>
-        </p:nvSpPr>
-        <p:spPr>
-          <a:xfrm>
-            <a:off x="7818120" y="1216152"/>
-            <a:ext cx="548640" cy="310896"/>
-          </a:xfrm>
-          <a:prstGeom prst="rect">
-            <a:avLst/>
-          </a:prstGeom>
-          <a:noFill/>
-          <a:ln/>
-        </p:spPr>
-        <p:txBody>
-          <a:bodyPr wrap="square" lIns="0" tIns="0" rIns="0" bIns="0" rtlCol="0" anchor="ctr"/>
-          <a:lstStyle/>
-          <a:p>
-            <a:pPr algn="ctr" indent="0" marL="0">
-              <a:buNone/>
-            </a:pPr>
-            <a:r>
-              <a:rPr lang="en-US" sz="1050" b="1" dirty="0">
-                <a:solidFill>
-                  <a:srgbClr val="B3410F"/>
-                </a:solidFill>
-                <a:latin typeface="Malgun Gothic" pitchFamily="34" charset="0"/>
-                <a:ea typeface="Malgun Gothic" pitchFamily="34" charset="-122"/>
-                <a:cs typeface="Malgun Gothic" pitchFamily="34" charset="-120"/>
-              </a:rPr>
-              <a:t>D-1</a:t>
-            </a:r>
-            <a:endParaRPr lang="en-US" sz="1050" dirty="0"/>
-          </a:p>
-        </p:txBody>
-      </p:sp>
-      <p:sp>
-        <p:nvSpPr>
-          <p:cNvPr id="12" name="Shape 10"/>
-          <p:cNvSpPr/>
-          <p:nvPr/>
-        </p:nvSpPr>
-        <p:spPr>
-          <a:xfrm>
-            <a:off x="5074920" y="2057400"/>
-            <a:ext cx="1051560" cy="457200"/>
-          </a:xfrm>
-          <a:prstGeom prst="rect">
-            <a:avLst/>
-          </a:prstGeom>
-          <a:solidFill>
-            <a:srgbClr val="004E36"/>
-          </a:solidFill>
-          <a:ln w="12700">
-            <a:solidFill>
-              <a:srgbClr val="004E36"/>
-            </a:solidFill>
-            <a:prstDash val="solid"/>
-          </a:ln>
-        </p:spPr>
-      </p:sp>
-      <p:sp>
-        <p:nvSpPr>
-          <p:cNvPr id="13" name="Text 11"/>
-          <p:cNvSpPr/>
-          <p:nvPr/>
-        </p:nvSpPr>
-        <p:spPr>
-          <a:xfrm>
-            <a:off x="5074920" y="2057400"/>
-            <a:ext cx="1051560" cy="457200"/>
-          </a:xfrm>
-          <a:prstGeom prst="rect">
-            <a:avLst/>
-          </a:prstGeom>
-          <a:noFill/>
-          <a:ln/>
-        </p:spPr>
-        <p:txBody>
-          <a:bodyPr wrap="square" lIns="0" tIns="0" rIns="0" bIns="0" rtlCol="0" anchor="ctr"/>
-          <a:lstStyle/>
-          <a:p>
-            <a:pPr algn="ctr" indent="0" marL="0">
-              <a:buNone/>
-            </a:pPr>
-            <a:r>
-              <a:rPr lang="en-US" sz="1100" b="1" dirty="0">
-                <a:solidFill>
-                  <a:srgbClr val="FFFFFF"/>
-                </a:solidFill>
-                <a:latin typeface="Malgun Gothic" pitchFamily="34" charset="0"/>
-                <a:ea typeface="Malgun Gothic" pitchFamily="34" charset="-122"/>
-                <a:cs typeface="Malgun Gothic" pitchFamily="34" charset="-120"/>
-              </a:rPr>
-              <a:t>오늘 먹기</a:t>
-            </a:r>
-            <a:endParaRPr lang="en-US" sz="1100" dirty="0"/>
-          </a:p>
-        </p:txBody>
-      </p:sp>
-      <p:sp>
-        <p:nvSpPr>
-          <p:cNvPr id="14" name="Shape 12"/>
-          <p:cNvSpPr/>
-          <p:nvPr/>
-        </p:nvSpPr>
-        <p:spPr>
-          <a:xfrm>
-            <a:off x="6217920" y="2057400"/>
-            <a:ext cx="1051560" cy="457200"/>
-          </a:xfrm>
-          <a:prstGeom prst="rect">
-            <a:avLst/>
-          </a:prstGeom>
-          <a:solidFill>
-            <a:srgbClr val="FFFFFF"/>
-          </a:solidFill>
-          <a:ln w="12700">
-            <a:solidFill>
-              <a:srgbClr val="2E2D2B"/>
-            </a:solidFill>
-            <a:prstDash val="solid"/>
-          </a:ln>
-        </p:spPr>
-      </p:sp>
-      <p:sp>
-        <p:nvSpPr>
-          <p:cNvPr id="15" name="Text 13"/>
-          <p:cNvSpPr/>
-          <p:nvPr/>
-        </p:nvSpPr>
-        <p:spPr>
-          <a:xfrm>
-            <a:off x="6217920" y="2057400"/>
-            <a:ext cx="1051560" cy="457200"/>
-          </a:xfrm>
-          <a:prstGeom prst="rect">
-            <a:avLst/>
-          </a:prstGeom>
-          <a:noFill/>
-          <a:ln/>
-        </p:spPr>
-        <p:txBody>
-          <a:bodyPr wrap="square" lIns="0" tIns="0" rIns="0" bIns="0" rtlCol="0" anchor="ctr"/>
-          <a:lstStyle/>
-          <a:p>
-            <a:pPr algn="ctr" indent="0" marL="0">
-              <a:buNone/>
-            </a:pPr>
-            <a:r>
-              <a:rPr lang="en-US" sz="1100" b="1" dirty="0">
-                <a:solidFill>
-                  <a:srgbClr val="2E2D2B"/>
-                </a:solidFill>
-                <a:latin typeface="Malgun Gothic" pitchFamily="34" charset="0"/>
-                <a:ea typeface="Malgun Gothic" pitchFamily="34" charset="-122"/>
-                <a:cs typeface="Malgun Gothic" pitchFamily="34" charset="-120"/>
-              </a:rPr>
-              <a:t>냉동하기</a:t>
-            </a:r>
-            <a:endParaRPr lang="en-US" sz="1100" dirty="0"/>
-          </a:p>
-        </p:txBody>
-      </p:sp>
-      <p:sp>
-        <p:nvSpPr>
-          <p:cNvPr id="16" name="Shape 14"/>
-          <p:cNvSpPr/>
-          <p:nvPr/>
-        </p:nvSpPr>
-        <p:spPr>
-          <a:xfrm>
-            <a:off x="7360920" y="2057400"/>
-            <a:ext cx="1051560" cy="457200"/>
-          </a:xfrm>
-          <a:prstGeom prst="rect">
-            <a:avLst/>
-          </a:prstGeom>
-          <a:solidFill>
-            <a:srgbClr val="FFFFFF"/>
-          </a:solidFill>
-          <a:ln w="12700">
-            <a:solidFill>
-              <a:srgbClr val="2E2D2B"/>
-            </a:solidFill>
-            <a:prstDash val="solid"/>
-          </a:ln>
-        </p:spPr>
-      </p:sp>
-      <p:sp>
-        <p:nvSpPr>
-          <p:cNvPr id="17" name="Text 15"/>
-          <p:cNvSpPr/>
-          <p:nvPr/>
-        </p:nvSpPr>
-        <p:spPr>
-          <a:xfrm>
-            <a:off x="7360920" y="2057400"/>
-            <a:ext cx="1051560" cy="457200"/>
-          </a:xfrm>
-          <a:prstGeom prst="rect">
-            <a:avLst/>
-          </a:prstGeom>
-          <a:noFill/>
-          <a:ln/>
-        </p:spPr>
-        <p:txBody>
-          <a:bodyPr wrap="square" lIns="0" tIns="0" rIns="0" bIns="0" rtlCol="0" anchor="ctr"/>
-          <a:lstStyle/>
-          <a:p>
-            <a:pPr algn="ctr" indent="0" marL="0">
-              <a:buNone/>
-            </a:pPr>
-            <a:r>
-              <a:rPr lang="en-US" sz="1100" b="1" dirty="0">
-                <a:solidFill>
-                  <a:srgbClr val="2E2D2B"/>
-                </a:solidFill>
-                <a:latin typeface="Malgun Gothic" pitchFamily="34" charset="0"/>
-                <a:ea typeface="Malgun Gothic" pitchFamily="34" charset="-122"/>
-                <a:cs typeface="Malgun Gothic" pitchFamily="34" charset="-120"/>
-              </a:rPr>
-              <a:t>손질하기</a:t>
-            </a:r>
-            <a:endParaRPr lang="en-US" sz="1100" dirty="0"/>
-          </a:p>
-        </p:txBody>
-      </p:sp>
-      <p:sp>
-        <p:nvSpPr>
-          <p:cNvPr id="18" name="Shape 16"/>
-          <p:cNvSpPr/>
-          <p:nvPr/>
-        </p:nvSpPr>
-        <p:spPr>
-          <a:xfrm>
-            <a:off x="4846320" y="2971800"/>
-            <a:ext cx="3749040" cy="1371600"/>
-          </a:xfrm>
-          <a:prstGeom prst="rect">
-            <a:avLst/>
-          </a:prstGeom>
-          <a:solidFill>
-            <a:srgbClr val="F8F7F5"/>
-          </a:solidFill>
-          <a:ln w="12700">
-            <a:solidFill>
-              <a:srgbClr val="D9D7D3"/>
-            </a:solidFill>
-            <a:prstDash val="solid"/>
-          </a:ln>
-        </p:spPr>
-      </p:sp>
-      <p:sp>
-        <p:nvSpPr>
-          <p:cNvPr id="19" name="Text 17"/>
-          <p:cNvSpPr/>
-          <p:nvPr/>
-        </p:nvSpPr>
-        <p:spPr>
-          <a:xfrm>
-            <a:off x="5074920" y="3127248"/>
-            <a:ext cx="3291840" cy="365760"/>
-          </a:xfrm>
-          <a:prstGeom prst="rect">
-            <a:avLst/>
-          </a:prstGeom>
-          <a:noFill/>
-          <a:ln/>
-        </p:spPr>
-        <p:txBody>
-          <a:bodyPr wrap="square" lIns="0" tIns="0" rIns="0" bIns="0" rtlCol="0" anchor="ctr"/>
-          <a:lstStyle/>
-          <a:p>
-            <a:pPr indent="0" marL="0">
-              <a:buNone/>
-            </a:pPr>
-            <a:r>
-              <a:rPr lang="en-US" sz="1300" b="1" dirty="0">
-                <a:solidFill>
-                  <a:srgbClr val="2E2D2B"/>
-                </a:solidFill>
-                <a:latin typeface="Malgun Gothic" pitchFamily="34" charset="0"/>
-                <a:ea typeface="Malgun Gothic" pitchFamily="34" charset="-122"/>
-                <a:cs typeface="Malgun Gothic" pitchFamily="34" charset="-120"/>
-              </a:rPr>
-              <a:t>대파  </a:t>
-            </a:r>
-            <a:pPr indent="0" marL="0">
-              <a:buNone/>
-            </a:pPr>
-            <a:r>
-              <a:rPr lang="en-US" sz="1300" b="1" dirty="0">
-                <a:solidFill>
-                  <a:srgbClr val="FFFFFF"/>
-                </a:solidFill>
-                <a:highlight>
-                  <a:srgbClr val="B3410F"/>
-                </a:highlight>
-                <a:latin typeface="Malgun Gothic" pitchFamily="34" charset="0"/>
-                <a:ea typeface="Malgun Gothic" pitchFamily="34" charset="-122"/>
-                <a:cs typeface="Malgun Gothic" pitchFamily="34" charset="-120"/>
-              </a:rPr>
-              <a:t>+2일 지남</a:t>
-            </a:r>
-            <a:endParaRPr lang="en-US" sz="1300" dirty="0"/>
-          </a:p>
-        </p:txBody>
-      </p:sp>
-      <p:sp>
-        <p:nvSpPr>
-          <p:cNvPr id="20" name="Shape 18"/>
+          <p:cNvPr id="21" name="Text 19"/>
           <p:cNvSpPr/>
           <p:nvPr/>
         </p:nvSpPr>
@@ -6327,31 +6473,6 @@
           <a:prstGeom prst="rect">
             <a:avLst/>
           </a:prstGeom>
-          <a:solidFill>
-            <a:srgbClr val="FFFFFF"/>
-          </a:solidFill>
-          <a:ln w="12700">
-            <a:solidFill>
-              <a:srgbClr val="B3410F"/>
-            </a:solidFill>
-            <a:prstDash val="solid"/>
-          </a:ln>
-        </p:spPr>
-      </p:sp>
-      <p:sp>
-        <p:nvSpPr>
-          <p:cNvPr id="21" name="Text 19"/>
-          <p:cNvSpPr/>
-          <p:nvPr/>
-        </p:nvSpPr>
-        <p:spPr>
-          <a:xfrm>
-            <a:off x="5074920" y="3611880"/>
-            <a:ext cx="3291840" cy="457200"/>
-          </a:xfrm>
-          <a:prstGeom prst="rect">
-            <a:avLst/>
-          </a:prstGeom>
           <a:noFill/>
           <a:ln/>
         </p:spPr>
@@ -6365,7 +6486,7 @@
             <a:r>
               <a:rPr lang="en-US" sz="1150" b="1" dirty="0">
                 <a:solidFill>
-                  <a:srgbClr val="B3410F"/>
+                  <a:srgbClr val="EF4A25"/>
                 </a:solidFill>
                 <a:latin typeface="Malgun Gothic" pitchFamily="34" charset="0"/>
                 <a:ea typeface="Malgun Gothic" pitchFamily="34" charset="-122"/>
@@ -6391,7 +6512,7 @@
     <p:bg>
       <p:bgPr>
         <a:solidFill>
-          <a:srgbClr val="FFFFFF"/>
+          <a:srgbClr val="FCFEF9"/>
         </a:solidFill>
       </p:bgPr>
     </p:bg>
@@ -6436,7 +6557,7 @@
             <a:r>
               <a:rPr lang="en-US" sz="1100" b="1" spc="300" kern="0" dirty="0">
                 <a:solidFill>
-                  <a:srgbClr val="004E36"/>
+                  <a:srgbClr val="2F9E14"/>
                 </a:solidFill>
                 <a:latin typeface="Malgun Gothic" pitchFamily="34" charset="0"/>
                 <a:ea typeface="Malgun Gothic" pitchFamily="34" charset="-122"/>
@@ -6475,7 +6596,7 @@
             <a:r>
               <a:rPr lang="en-US" sz="2700" b="1" dirty="0">
                 <a:solidFill>
-                  <a:srgbClr val="2E2D2B"/>
+                  <a:srgbClr val="17251C"/>
                 </a:solidFill>
                 <a:latin typeface="Malgun Gothic" pitchFamily="34" charset="0"/>
                 <a:ea typeface="Malgun Gothic" pitchFamily="34" charset="-122"/>
@@ -6514,7 +6635,7 @@
             <a:r>
               <a:rPr lang="en-US" sz="5400" b="1" dirty="0">
                 <a:solidFill>
-                  <a:srgbClr val="004E36"/>
+                  <a:srgbClr val="2F9E14"/>
                 </a:solidFill>
                 <a:latin typeface="Malgun Gothic" pitchFamily="34" charset="0"/>
                 <a:ea typeface="Malgun Gothic" pitchFamily="34" charset="-122"/>
@@ -6553,7 +6674,7 @@
             <a:r>
               <a:rPr lang="en-US" sz="1300" dirty="0">
                 <a:solidFill>
-                  <a:srgbClr val="6B6965"/>
+                  <a:srgbClr val="6D7A6F"/>
                 </a:solidFill>
                 <a:latin typeface="Malgun Gothic" pitchFamily="34" charset="0"/>
                 <a:ea typeface="Malgun Gothic" pitchFamily="34" charset="-122"/>
@@ -6592,7 +6713,7 @@
             <a:r>
               <a:rPr lang="en-US" sz="5400" b="1" dirty="0">
                 <a:solidFill>
-                  <a:srgbClr val="004E36"/>
+                  <a:srgbClr val="2F9E14"/>
                 </a:solidFill>
                 <a:latin typeface="Malgun Gothic" pitchFamily="34" charset="0"/>
                 <a:ea typeface="Malgun Gothic" pitchFamily="34" charset="-122"/>
@@ -6631,7 +6752,7 @@
             <a:r>
               <a:rPr lang="en-US" sz="1300" dirty="0">
                 <a:solidFill>
-                  <a:srgbClr val="6B6965"/>
+                  <a:srgbClr val="6D7A6F"/>
                 </a:solidFill>
                 <a:latin typeface="Malgun Gothic" pitchFamily="34" charset="0"/>
                 <a:ea typeface="Malgun Gothic" pitchFamily="34" charset="-122"/>
@@ -6654,18 +6775,15 @@
             <a:off x="548640" y="3337560"/>
             <a:ext cx="8046720" cy="777240"/>
           </a:xfrm>
-          <a:prstGeom prst="rect">
-            <a:avLst/>
+          <a:prstGeom prst="roundRect">
+            <a:avLst>
+              <a:gd name="adj" fmla="val 10588"/>
+            </a:avLst>
           </a:prstGeom>
           <a:solidFill>
-            <a:srgbClr val="E7EFEA"/>
+            <a:srgbClr val="E7F9D7"/>
           </a:solidFill>
-          <a:ln w="12700">
-            <a:solidFill>
-              <a:srgbClr val="004E36"/>
-            </a:solidFill>
-            <a:prstDash val="solid"/>
-          </a:ln>
+          <a:ln/>
         </p:spPr>
       </p:sp>
       <p:sp>
@@ -6695,7 +6813,7 @@
             <a:r>
               <a:rPr lang="en-US" sz="1400" b="1" dirty="0">
                 <a:solidFill>
-                  <a:srgbClr val="2E2D2B"/>
+                  <a:srgbClr val="17251C"/>
                 </a:solidFill>
                 <a:latin typeface="Malgun Gothic" pitchFamily="34" charset="0"/>
                 <a:ea typeface="Malgun Gothic" pitchFamily="34" charset="-122"/>
@@ -6734,7 +6852,7 @@
             <a:r>
               <a:rPr lang="en-US" sz="950" dirty="0">
                 <a:solidFill>
-                  <a:srgbClr val="6B6965"/>
+                  <a:srgbClr val="6D7A6F"/>
                 </a:solidFill>
                 <a:latin typeface="Malgun Gothic" pitchFamily="34" charset="0"/>
                 <a:ea typeface="Malgun Gothic" pitchFamily="34" charset="-122"/>
@@ -6760,7 +6878,7 @@
     <p:bg>
       <p:bgPr>
         <a:solidFill>
-          <a:srgbClr val="FFFFFF"/>
+          <a:srgbClr val="FCFEF9"/>
         </a:solidFill>
       </p:bgPr>
     </p:bg>
@@ -6805,7 +6923,7 @@
             <a:r>
               <a:rPr lang="en-US" sz="1100" b="1" spc="300" kern="0" dirty="0">
                 <a:solidFill>
-                  <a:srgbClr val="004E36"/>
+                  <a:srgbClr val="2F9E14"/>
                 </a:solidFill>
                 <a:latin typeface="Malgun Gothic" pitchFamily="34" charset="0"/>
                 <a:ea typeface="Malgun Gothic" pitchFamily="34" charset="-122"/>
@@ -6844,7 +6962,7 @@
             <a:r>
               <a:rPr lang="en-US" sz="2700" b="1" dirty="0">
                 <a:solidFill>
-                  <a:srgbClr val="2E2D2B"/>
+                  <a:srgbClr val="17251C"/>
                 </a:solidFill>
                 <a:latin typeface="Malgun Gothic" pitchFamily="34" charset="0"/>
                 <a:ea typeface="Malgun Gothic" pitchFamily="34" charset="-122"/>
@@ -6867,15 +6985,17 @@
             <a:off x="548640" y="1645920"/>
             <a:ext cx="3886200" cy="2240280"/>
           </a:xfrm>
-          <a:prstGeom prst="rect">
-            <a:avLst/>
+          <a:prstGeom prst="roundRect">
+            <a:avLst>
+              <a:gd name="adj" fmla="val 4082"/>
+            </a:avLst>
           </a:prstGeom>
           <a:solidFill>
-            <a:srgbClr val="F8F7F5"/>
+            <a:srgbClr val="FFFFFF"/>
           </a:solidFill>
           <a:ln w="12700">
             <a:solidFill>
-              <a:srgbClr val="D9D7D3"/>
+              <a:srgbClr val="E3ECDA"/>
             </a:solidFill>
             <a:prstDash val="solid"/>
           </a:ln>
@@ -6908,7 +7028,7 @@
             <a:r>
               <a:rPr lang="en-US" sz="1800" b="1" dirty="0">
                 <a:solidFill>
-                  <a:srgbClr val="2E2D2B"/>
+                  <a:srgbClr val="17251C"/>
                 </a:solidFill>
                 <a:latin typeface="Malgun Gothic" pitchFamily="34" charset="0"/>
                 <a:ea typeface="Malgun Gothic" pitchFamily="34" charset="-122"/>
@@ -6947,7 +7067,7 @@
             <a:r>
               <a:rPr lang="en-US" sz="1300" dirty="0">
                 <a:solidFill>
-                  <a:srgbClr val="6B6965"/>
+                  <a:srgbClr val="6D7A6F"/>
                 </a:solidFill>
                 <a:latin typeface="Malgun Gothic" pitchFamily="34" charset="0"/>
                 <a:ea typeface="Malgun Gothic" pitchFamily="34" charset="-122"/>
@@ -6964,7 +7084,7 @@
             <a:r>
               <a:rPr lang="en-US" sz="1300" dirty="0">
                 <a:solidFill>
-                  <a:srgbClr val="6B6965"/>
+                  <a:srgbClr val="6D7A6F"/>
                 </a:solidFill>
                 <a:latin typeface="Malgun Gothic" pitchFamily="34" charset="0"/>
                 <a:ea typeface="Malgun Gothic" pitchFamily="34" charset="-122"/>
@@ -6987,15 +7107,17 @@
             <a:off x="4709160" y="1645920"/>
             <a:ext cx="3886200" cy="2240280"/>
           </a:xfrm>
-          <a:prstGeom prst="rect">
-            <a:avLst/>
+          <a:prstGeom prst="roundRect">
+            <a:avLst>
+              <a:gd name="adj" fmla="val 4082"/>
+            </a:avLst>
           </a:prstGeom>
           <a:solidFill>
-            <a:srgbClr val="E7EFEA"/>
+            <a:srgbClr val="E7F9D7"/>
           </a:solidFill>
-          <a:ln w="15875">
+          <a:ln w="19050">
             <a:solidFill>
-              <a:srgbClr val="004E36"/>
+              <a:srgbClr val="5BD41E"/>
             </a:solidFill>
             <a:prstDash val="solid"/>
           </a:ln>
@@ -7028,7 +7150,7 @@
             <a:r>
               <a:rPr lang="en-US" sz="1800" b="1" dirty="0">
                 <a:solidFill>
-                  <a:srgbClr val="004E36"/>
+                  <a:srgbClr val="2F9E14"/>
                 </a:solidFill>
                 <a:latin typeface="Malgun Gothic" pitchFamily="34" charset="0"/>
                 <a:ea typeface="Malgun Gothic" pitchFamily="34" charset="-122"/>
@@ -7067,7 +7189,7 @@
             <a:r>
               <a:rPr lang="en-US" sz="1300" dirty="0">
                 <a:solidFill>
-                  <a:srgbClr val="2E2D2B"/>
+                  <a:srgbClr val="17251C"/>
                 </a:solidFill>
                 <a:latin typeface="Malgun Gothic" pitchFamily="34" charset="0"/>
                 <a:ea typeface="Malgun Gothic" pitchFamily="34" charset="-122"/>
@@ -7084,7 +7206,7 @@
             <a:r>
               <a:rPr lang="en-US" sz="1300" dirty="0">
                 <a:solidFill>
-                  <a:srgbClr val="2E2D2B"/>
+                  <a:srgbClr val="17251C"/>
                 </a:solidFill>
                 <a:latin typeface="Malgun Gothic" pitchFamily="34" charset="0"/>
                 <a:ea typeface="Malgun Gothic" pitchFamily="34" charset="-122"/>
@@ -7123,7 +7245,7 @@
             <a:r>
               <a:rPr lang="en-US" sz="1300" b="1" dirty="0">
                 <a:solidFill>
-                  <a:srgbClr val="004E36"/>
+                  <a:srgbClr val="2F9E14"/>
                 </a:solidFill>
                 <a:latin typeface="Malgun Gothic" pitchFamily="34" charset="0"/>
                 <a:ea typeface="Malgun Gothic" pitchFamily="34" charset="-122"/>

--- a/docs/이거먼저-발표.pptx
+++ b/docs/이거먼저-발표.pptx
@@ -5093,18 +5093,18 @@
         </p:nvSpPr>
         <p:spPr>
           <a:xfrm>
-            <a:off x="548640" y="1051560"/>
-            <a:ext cx="3566160" cy="603504"/>
+            <a:off x="502920" y="548640"/>
+            <a:ext cx="3794760" cy="4160520"/>
           </a:xfrm>
           <a:prstGeom prst="roundRect">
             <a:avLst>
-              <a:gd name="adj" fmla="val 10606"/>
+              <a:gd name="adj" fmla="val 4337"/>
             </a:avLst>
           </a:prstGeom>
           <a:solidFill>
-            <a:srgbClr val="E7F9D7"/>
+            <a:srgbClr val="F1F6EC"/>
           </a:solidFill>
-          <a:ln w="15875">
+          <a:ln w="25400">
             <a:solidFill>
               <a:srgbClr val="E3ECDA"/>
             </a:solidFill>
@@ -5114,63 +5114,85 @@
       </p:sp>
       <p:sp>
         <p:nvSpPr>
-          <p:cNvPr id="3" name="Text 1"/>
-          <p:cNvSpPr/>
-          <p:nvPr/>
-        </p:nvSpPr>
-        <p:spPr>
-          <a:xfrm>
-            <a:off x="777240" y="1051560"/>
-            <a:ext cx="1828800" cy="603504"/>
-          </a:xfrm>
-          <a:prstGeom prst="rect">
-            <a:avLst/>
-          </a:prstGeom>
-          <a:noFill/>
-          <a:ln/>
-        </p:spPr>
-        <p:txBody>
-          <a:bodyPr wrap="square" lIns="0" tIns="0" rIns="0" bIns="0" rtlCol="0" anchor="ctr"/>
-          <a:lstStyle/>
-          <a:p>
-            <a:pPr indent="0" marL="0">
-              <a:buNone/>
-            </a:pPr>
-            <a:r>
-              <a:rPr lang="en-US" sz="1300" b="1" dirty="0">
-                <a:solidFill>
-                  <a:srgbClr val="17251C"/>
-                </a:solidFill>
-                <a:latin typeface="Malgun Gothic" pitchFamily="34" charset="0"/>
-                <a:ea typeface="Malgun Gothic" pitchFamily="34" charset="-122"/>
-                <a:cs typeface="Malgun Gothic" pitchFamily="34" charset="-120"/>
-              </a:rPr>
-              <a:t>냉동칸</a:t>
-            </a:r>
-            <a:endParaRPr lang="en-US" sz="1300" dirty="0"/>
-          </a:p>
-        </p:txBody>
-      </p:sp>
-      <p:sp>
-        <p:nvSpPr>
-          <p:cNvPr id="4" name="Shape 2"/>
-          <p:cNvSpPr/>
-          <p:nvPr/>
-        </p:nvSpPr>
-        <p:spPr>
-          <a:xfrm>
-            <a:off x="548640" y="1764792"/>
-            <a:ext cx="3566160" cy="603504"/>
+          <p:cNvPr id="3" name="Shape 1"/>
+          <p:cNvSpPr/>
+          <p:nvPr/>
+        </p:nvSpPr>
+        <p:spPr>
+          <a:xfrm>
+            <a:off x="4114800" y="1417320"/>
+            <a:ext cx="82296" cy="1371600"/>
           </a:xfrm>
           <a:prstGeom prst="roundRect">
             <a:avLst>
-              <a:gd name="adj" fmla="val 10606"/>
+              <a:gd name="adj" fmla="val 55556"/>
+            </a:avLst>
+          </a:prstGeom>
+          <a:solidFill>
+            <a:srgbClr val="E3ECDA"/>
+          </a:solidFill>
+          <a:ln/>
+        </p:spPr>
+      </p:sp>
+      <p:sp>
+        <p:nvSpPr>
+          <p:cNvPr id="4" name="Text 2"/>
+          <p:cNvSpPr/>
+          <p:nvPr/>
+        </p:nvSpPr>
+        <p:spPr>
+          <a:xfrm>
+            <a:off x="713232" y="658368"/>
+            <a:ext cx="1828800" cy="256032"/>
+          </a:xfrm>
+          <a:prstGeom prst="rect">
+            <a:avLst/>
+          </a:prstGeom>
+          <a:noFill/>
+          <a:ln/>
+        </p:spPr>
+        <p:txBody>
+          <a:bodyPr wrap="square" lIns="0" tIns="0" rIns="0" bIns="0" rtlCol="0" anchor="ctr"/>
+          <a:lstStyle/>
+          <a:p>
+            <a:pPr indent="0" marL="0">
+              <a:buNone/>
+            </a:pPr>
+            <a:r>
+              <a:rPr lang="en-US" sz="900" b="1" spc="200" kern="0" dirty="0">
+                <a:solidFill>
+                  <a:srgbClr val="6D7A6F"/>
+                </a:solidFill>
+                <a:latin typeface="Malgun Gothic" pitchFamily="34" charset="0"/>
+                <a:ea typeface="Malgun Gothic" pitchFamily="34" charset="-122"/>
+                <a:cs typeface="Malgun Gothic" pitchFamily="34" charset="-120"/>
+              </a:rPr>
+              <a:t>냉장실</a:t>
+            </a:r>
+            <a:endParaRPr lang="en-US" sz="900" dirty="0"/>
+          </a:p>
+        </p:txBody>
+      </p:sp>
+      <p:sp>
+        <p:nvSpPr>
+          <p:cNvPr id="5" name="Shape 3"/>
+          <p:cNvSpPr/>
+          <p:nvPr/>
+        </p:nvSpPr>
+        <p:spPr>
+          <a:xfrm>
+            <a:off x="713232" y="960120"/>
+            <a:ext cx="3246120" cy="548640"/>
+          </a:xfrm>
+          <a:prstGeom prst="roundRect">
+            <a:avLst>
+              <a:gd name="adj" fmla="val 10000"/>
             </a:avLst>
           </a:prstGeom>
           <a:solidFill>
             <a:srgbClr val="FFFFFF"/>
           </a:solidFill>
-          <a:ln w="15875">
+          <a:ln w="12700">
             <a:solidFill>
               <a:srgbClr val="E3ECDA"/>
             </a:solidFill>
@@ -5180,30 +5202,30 @@
       </p:sp>
       <p:sp>
         <p:nvSpPr>
-          <p:cNvPr id="5" name="Text 3"/>
-          <p:cNvSpPr/>
-          <p:nvPr/>
-        </p:nvSpPr>
-        <p:spPr>
-          <a:xfrm>
-            <a:off x="777240" y="1764792"/>
-            <a:ext cx="1828800" cy="603504"/>
-          </a:xfrm>
-          <a:prstGeom prst="rect">
-            <a:avLst/>
-          </a:prstGeom>
-          <a:noFill/>
-          <a:ln/>
-        </p:spPr>
-        <p:txBody>
-          <a:bodyPr wrap="square" lIns="0" tIns="0" rIns="0" bIns="0" rtlCol="0" anchor="ctr"/>
-          <a:lstStyle/>
-          <a:p>
-            <a:pPr indent="0" marL="0">
-              <a:buNone/>
-            </a:pPr>
-            <a:r>
-              <a:rPr lang="en-US" sz="1300" b="1" dirty="0">
+          <p:cNvPr id="6" name="Text 4"/>
+          <p:cNvSpPr/>
+          <p:nvPr/>
+        </p:nvSpPr>
+        <p:spPr>
+          <a:xfrm>
+            <a:off x="896112" y="960120"/>
+            <a:ext cx="1828800" cy="548640"/>
+          </a:xfrm>
+          <a:prstGeom prst="rect">
+            <a:avLst/>
+          </a:prstGeom>
+          <a:noFill/>
+          <a:ln/>
+        </p:spPr>
+        <p:txBody>
+          <a:bodyPr wrap="square" lIns="0" tIns="0" rIns="0" bIns="0" rtlCol="0" anchor="ctr"/>
+          <a:lstStyle/>
+          <a:p>
+            <a:pPr indent="0" marL="0">
+              <a:buNone/>
+            </a:pPr>
+            <a:r>
+              <a:rPr lang="en-US" sz="1250" b="1" dirty="0">
                 <a:solidFill>
                   <a:srgbClr val="17251C"/>
                 </a:solidFill>
@@ -5213,30 +5235,30 @@
               </a:rPr>
               <a:t>냉장 1칸</a:t>
             </a:r>
-            <a:endParaRPr lang="en-US" sz="1300" dirty="0"/>
-          </a:p>
-        </p:txBody>
-      </p:sp>
-      <p:sp>
-        <p:nvSpPr>
-          <p:cNvPr id="6" name="Shape 4"/>
-          <p:cNvSpPr/>
-          <p:nvPr/>
-        </p:nvSpPr>
-        <p:spPr>
-          <a:xfrm>
-            <a:off x="548640" y="2478024"/>
-            <a:ext cx="3566160" cy="603504"/>
+            <a:endParaRPr lang="en-US" sz="1250" dirty="0"/>
+          </a:p>
+        </p:txBody>
+      </p:sp>
+      <p:sp>
+        <p:nvSpPr>
+          <p:cNvPr id="7" name="Shape 5"/>
+          <p:cNvSpPr/>
+          <p:nvPr/>
+        </p:nvSpPr>
+        <p:spPr>
+          <a:xfrm>
+            <a:off x="713232" y="1618488"/>
+            <a:ext cx="3246120" cy="548640"/>
           </a:xfrm>
           <a:prstGeom prst="roundRect">
             <a:avLst>
-              <a:gd name="adj" fmla="val 10606"/>
+              <a:gd name="adj" fmla="val 10000"/>
             </a:avLst>
           </a:prstGeom>
           <a:solidFill>
             <a:srgbClr val="FFFFFF"/>
           </a:solidFill>
-          <a:ln w="15875">
+          <a:ln w="12700">
             <a:solidFill>
               <a:srgbClr val="E3ECDA"/>
             </a:solidFill>
@@ -5246,30 +5268,30 @@
       </p:sp>
       <p:sp>
         <p:nvSpPr>
-          <p:cNvPr id="7" name="Text 5"/>
-          <p:cNvSpPr/>
-          <p:nvPr/>
-        </p:nvSpPr>
-        <p:spPr>
-          <a:xfrm>
-            <a:off x="777240" y="2478024"/>
-            <a:ext cx="1828800" cy="603504"/>
-          </a:xfrm>
-          <a:prstGeom prst="rect">
-            <a:avLst/>
-          </a:prstGeom>
-          <a:noFill/>
-          <a:ln/>
-        </p:spPr>
-        <p:txBody>
-          <a:bodyPr wrap="square" lIns="0" tIns="0" rIns="0" bIns="0" rtlCol="0" anchor="ctr"/>
-          <a:lstStyle/>
-          <a:p>
-            <a:pPr indent="0" marL="0">
-              <a:buNone/>
-            </a:pPr>
-            <a:r>
-              <a:rPr lang="en-US" sz="1300" b="1" dirty="0">
+          <p:cNvPr id="8" name="Text 6"/>
+          <p:cNvSpPr/>
+          <p:nvPr/>
+        </p:nvSpPr>
+        <p:spPr>
+          <a:xfrm>
+            <a:off x="896112" y="1618488"/>
+            <a:ext cx="1828800" cy="548640"/>
+          </a:xfrm>
+          <a:prstGeom prst="rect">
+            <a:avLst/>
+          </a:prstGeom>
+          <a:noFill/>
+          <a:ln/>
+        </p:spPr>
+        <p:txBody>
+          <a:bodyPr wrap="square" lIns="0" tIns="0" rIns="0" bIns="0" rtlCol="0" anchor="ctr"/>
+          <a:lstStyle/>
+          <a:p>
+            <a:pPr indent="0" marL="0">
+              <a:buNone/>
+            </a:pPr>
+            <a:r>
+              <a:rPr lang="en-US" sz="1250" b="1" dirty="0">
                 <a:solidFill>
                   <a:srgbClr val="17251C"/>
                 </a:solidFill>
@@ -5279,20 +5301,20 @@
               </a:rPr>
               <a:t>냉장 2칸</a:t>
             </a:r>
-            <a:endParaRPr lang="en-US" sz="1300" dirty="0"/>
-          </a:p>
-        </p:txBody>
-      </p:sp>
-      <p:sp>
-        <p:nvSpPr>
-          <p:cNvPr id="8" name="Shape 6"/>
-          <p:cNvSpPr/>
-          <p:nvPr/>
-        </p:nvSpPr>
-        <p:spPr>
-          <a:xfrm>
-            <a:off x="3200400" y="2633472"/>
-            <a:ext cx="777240" cy="292608"/>
+            <a:endParaRPr lang="en-US" sz="1250" dirty="0"/>
+          </a:p>
+        </p:txBody>
+      </p:sp>
+      <p:sp>
+        <p:nvSpPr>
+          <p:cNvPr id="9" name="Shape 7"/>
+          <p:cNvSpPr/>
+          <p:nvPr/>
+        </p:nvSpPr>
+        <p:spPr>
+          <a:xfrm>
+            <a:off x="3090672" y="1755648"/>
+            <a:ext cx="749808" cy="274320"/>
           </a:xfrm>
           <a:prstGeom prst="roundRect">
             <a:avLst>
@@ -5307,14 +5329,14 @@
       </p:sp>
       <p:sp>
         <p:nvSpPr>
-          <p:cNvPr id="9" name="Text 7"/>
-          <p:cNvSpPr/>
-          <p:nvPr/>
-        </p:nvSpPr>
-        <p:spPr>
-          <a:xfrm>
-            <a:off x="3200400" y="2633472"/>
-            <a:ext cx="777240" cy="292608"/>
+          <p:cNvPr id="10" name="Text 8"/>
+          <p:cNvSpPr/>
+          <p:nvPr/>
+        </p:nvSpPr>
+        <p:spPr>
+          <a:xfrm>
+            <a:off x="3090672" y="1755648"/>
+            <a:ext cx="749808" cy="274320"/>
           </a:xfrm>
           <a:prstGeom prst="rect">
             <a:avLst/>
@@ -5330,7 +5352,7 @@
               <a:buNone/>
             </a:pPr>
             <a:r>
-              <a:rPr lang="en-US" sz="1000" b="1" dirty="0">
+              <a:rPr lang="en-US" sz="950" b="1" dirty="0">
                 <a:solidFill>
                   <a:srgbClr val="FFFFFF"/>
                 </a:solidFill>
@@ -5340,30 +5362,30 @@
               </a:rPr>
               <a:t>1 임박</a:t>
             </a:r>
-            <a:endParaRPr lang="en-US" sz="1000" dirty="0"/>
-          </a:p>
-        </p:txBody>
-      </p:sp>
-      <p:sp>
-        <p:nvSpPr>
-          <p:cNvPr id="10" name="Shape 8"/>
-          <p:cNvSpPr/>
-          <p:nvPr/>
-        </p:nvSpPr>
-        <p:spPr>
-          <a:xfrm>
-            <a:off x="548640" y="3191256"/>
-            <a:ext cx="3566160" cy="603504"/>
+            <a:endParaRPr lang="en-US" sz="950" dirty="0"/>
+          </a:p>
+        </p:txBody>
+      </p:sp>
+      <p:sp>
+        <p:nvSpPr>
+          <p:cNvPr id="11" name="Shape 9"/>
+          <p:cNvSpPr/>
+          <p:nvPr/>
+        </p:nvSpPr>
+        <p:spPr>
+          <a:xfrm>
+            <a:off x="713232" y="2276856"/>
+            <a:ext cx="3246120" cy="548640"/>
           </a:xfrm>
           <a:prstGeom prst="roundRect">
             <a:avLst>
-              <a:gd name="adj" fmla="val 10606"/>
+              <a:gd name="adj" fmla="val 10000"/>
             </a:avLst>
           </a:prstGeom>
           <a:solidFill>
-            <a:srgbClr val="FFFFFF"/>
+            <a:srgbClr val="FFF4C2"/>
           </a:solidFill>
-          <a:ln w="15875">
+          <a:ln w="12700">
             <a:solidFill>
               <a:srgbClr val="E3ECDA"/>
             </a:solidFill>
@@ -5373,30 +5395,30 @@
       </p:sp>
       <p:sp>
         <p:nvSpPr>
-          <p:cNvPr id="11" name="Text 9"/>
-          <p:cNvSpPr/>
-          <p:nvPr/>
-        </p:nvSpPr>
-        <p:spPr>
-          <a:xfrm>
-            <a:off x="777240" y="3191256"/>
-            <a:ext cx="1828800" cy="603504"/>
-          </a:xfrm>
-          <a:prstGeom prst="rect">
-            <a:avLst/>
-          </a:prstGeom>
-          <a:noFill/>
-          <a:ln/>
-        </p:spPr>
-        <p:txBody>
-          <a:bodyPr wrap="square" lIns="0" tIns="0" rIns="0" bIns="0" rtlCol="0" anchor="ctr"/>
-          <a:lstStyle/>
-          <a:p>
-            <a:pPr indent="0" marL="0">
-              <a:buNone/>
-            </a:pPr>
-            <a:r>
-              <a:rPr lang="en-US" sz="1300" b="1" dirty="0">
+          <p:cNvPr id="12" name="Text 10"/>
+          <p:cNvSpPr/>
+          <p:nvPr/>
+        </p:nvSpPr>
+        <p:spPr>
+          <a:xfrm>
+            <a:off x="896112" y="2276856"/>
+            <a:ext cx="1828800" cy="548640"/>
+          </a:xfrm>
+          <a:prstGeom prst="rect">
+            <a:avLst/>
+          </a:prstGeom>
+          <a:noFill/>
+          <a:ln/>
+        </p:spPr>
+        <p:txBody>
+          <a:bodyPr wrap="square" lIns="0" tIns="0" rIns="0" bIns="0" rtlCol="0" anchor="ctr"/>
+          <a:lstStyle/>
+          <a:p>
+            <a:pPr indent="0" marL="0">
+              <a:buNone/>
+            </a:pPr>
+            <a:r>
+              <a:rPr lang="en-US" sz="1250" b="1" dirty="0">
                 <a:solidFill>
                   <a:srgbClr val="17251C"/>
                 </a:solidFill>
@@ -5406,30 +5428,30 @@
               </a:rPr>
               <a:t>문칸</a:t>
             </a:r>
-            <a:endParaRPr lang="en-US" sz="1300" dirty="0"/>
-          </a:p>
-        </p:txBody>
-      </p:sp>
-      <p:sp>
-        <p:nvSpPr>
-          <p:cNvPr id="12" name="Shape 10"/>
-          <p:cNvSpPr/>
-          <p:nvPr/>
-        </p:nvSpPr>
-        <p:spPr>
-          <a:xfrm>
-            <a:off x="548640" y="3904488"/>
-            <a:ext cx="3566160" cy="603504"/>
+            <a:endParaRPr lang="en-US" sz="1250" dirty="0"/>
+          </a:p>
+        </p:txBody>
+      </p:sp>
+      <p:sp>
+        <p:nvSpPr>
+          <p:cNvPr id="13" name="Shape 11"/>
+          <p:cNvSpPr/>
+          <p:nvPr/>
+        </p:nvSpPr>
+        <p:spPr>
+          <a:xfrm>
+            <a:off x="713232" y="2935224"/>
+            <a:ext cx="3246120" cy="548640"/>
           </a:xfrm>
           <a:prstGeom prst="roundRect">
             <a:avLst>
-              <a:gd name="adj" fmla="val 10606"/>
+              <a:gd name="adj" fmla="val 10000"/>
             </a:avLst>
           </a:prstGeom>
           <a:solidFill>
-            <a:srgbClr val="FFFFFF"/>
+            <a:srgbClr val="E7F9D7"/>
           </a:solidFill>
-          <a:ln w="15875">
+          <a:ln w="12700">
             <a:solidFill>
               <a:srgbClr val="E3ECDA"/>
             </a:solidFill>
@@ -5439,30 +5461,30 @@
       </p:sp>
       <p:sp>
         <p:nvSpPr>
-          <p:cNvPr id="13" name="Text 11"/>
-          <p:cNvSpPr/>
-          <p:nvPr/>
-        </p:nvSpPr>
-        <p:spPr>
-          <a:xfrm>
-            <a:off x="777240" y="3904488"/>
-            <a:ext cx="1828800" cy="603504"/>
-          </a:xfrm>
-          <a:prstGeom prst="rect">
-            <a:avLst/>
-          </a:prstGeom>
-          <a:noFill/>
-          <a:ln/>
-        </p:spPr>
-        <p:txBody>
-          <a:bodyPr wrap="square" lIns="0" tIns="0" rIns="0" bIns="0" rtlCol="0" anchor="ctr"/>
-          <a:lstStyle/>
-          <a:p>
-            <a:pPr indent="0" marL="0">
-              <a:buNone/>
-            </a:pPr>
-            <a:r>
-              <a:rPr lang="en-US" sz="1300" b="1" dirty="0">
+          <p:cNvPr id="14" name="Text 12"/>
+          <p:cNvSpPr/>
+          <p:nvPr/>
+        </p:nvSpPr>
+        <p:spPr>
+          <a:xfrm>
+            <a:off x="896112" y="2935224"/>
+            <a:ext cx="1828800" cy="548640"/>
+          </a:xfrm>
+          <a:prstGeom prst="rect">
+            <a:avLst/>
+          </a:prstGeom>
+          <a:noFill/>
+          <a:ln/>
+        </p:spPr>
+        <p:txBody>
+          <a:bodyPr wrap="square" lIns="0" tIns="0" rIns="0" bIns="0" rtlCol="0" anchor="ctr"/>
+          <a:lstStyle/>
+          <a:p>
+            <a:pPr indent="0" marL="0">
+              <a:buNone/>
+            </a:pPr>
+            <a:r>
+              <a:rPr lang="en-US" sz="1250" b="1" dirty="0">
                 <a:solidFill>
                   <a:srgbClr val="17251C"/>
                 </a:solidFill>
@@ -5472,20 +5494,20 @@
               </a:rPr>
               <a:t>야채칸</a:t>
             </a:r>
-            <a:endParaRPr lang="en-US" sz="1300" dirty="0"/>
-          </a:p>
-        </p:txBody>
-      </p:sp>
-      <p:sp>
-        <p:nvSpPr>
-          <p:cNvPr id="14" name="Shape 12"/>
-          <p:cNvSpPr/>
-          <p:nvPr/>
-        </p:nvSpPr>
-        <p:spPr>
-          <a:xfrm>
-            <a:off x="3200400" y="4059936"/>
-            <a:ext cx="777240" cy="292608"/>
+            <a:endParaRPr lang="en-US" sz="1250" dirty="0"/>
+          </a:p>
+        </p:txBody>
+      </p:sp>
+      <p:sp>
+        <p:nvSpPr>
+          <p:cNvPr id="15" name="Shape 13"/>
+          <p:cNvSpPr/>
+          <p:nvPr/>
+        </p:nvSpPr>
+        <p:spPr>
+          <a:xfrm>
+            <a:off x="3090672" y="3072384"/>
+            <a:ext cx="749808" cy="274320"/>
           </a:xfrm>
           <a:prstGeom prst="roundRect">
             <a:avLst>
@@ -5500,14 +5522,14 @@
       </p:sp>
       <p:sp>
         <p:nvSpPr>
-          <p:cNvPr id="15" name="Text 13"/>
-          <p:cNvSpPr/>
-          <p:nvPr/>
-        </p:nvSpPr>
-        <p:spPr>
-          <a:xfrm>
-            <a:off x="3200400" y="4059936"/>
-            <a:ext cx="777240" cy="292608"/>
+          <p:cNvPr id="16" name="Text 14"/>
+          <p:cNvSpPr/>
+          <p:nvPr/>
+        </p:nvSpPr>
+        <p:spPr>
+          <a:xfrm>
+            <a:off x="3090672" y="3072384"/>
+            <a:ext cx="749808" cy="274320"/>
           </a:xfrm>
           <a:prstGeom prst="rect">
             <a:avLst/>
@@ -5523,7 +5545,7 @@
               <a:buNone/>
             </a:pPr>
             <a:r>
-              <a:rPr lang="en-US" sz="1000" b="1" dirty="0">
+              <a:rPr lang="en-US" sz="950" b="1" dirty="0">
                 <a:solidFill>
                   <a:srgbClr val="FFFFFF"/>
                 </a:solidFill>
@@ -5533,13 +5555,160 @@
               </a:rPr>
               <a:t>2 임박</a:t>
             </a:r>
-            <a:endParaRPr lang="en-US" sz="1000" dirty="0"/>
-          </a:p>
-        </p:txBody>
-      </p:sp>
-      <p:sp>
-        <p:nvSpPr>
-          <p:cNvPr id="16" name="Text 14"/>
+            <a:endParaRPr lang="en-US" sz="950" dirty="0"/>
+          </a:p>
+        </p:txBody>
+      </p:sp>
+      <p:sp>
+        <p:nvSpPr>
+          <p:cNvPr id="17" name="Shape 15"/>
+          <p:cNvSpPr/>
+          <p:nvPr/>
+        </p:nvSpPr>
+        <p:spPr>
+          <a:xfrm>
+            <a:off x="713232" y="3648456"/>
+            <a:ext cx="3246120" cy="27432"/>
+          </a:xfrm>
+          <a:prstGeom prst="rect">
+            <a:avLst/>
+          </a:prstGeom>
+          <a:solidFill>
+            <a:srgbClr val="E3ECDA"/>
+          </a:solidFill>
+          <a:ln/>
+        </p:spPr>
+      </p:sp>
+      <p:sp>
+        <p:nvSpPr>
+          <p:cNvPr id="18" name="Text 16"/>
+          <p:cNvSpPr/>
+          <p:nvPr/>
+        </p:nvSpPr>
+        <p:spPr>
+          <a:xfrm>
+            <a:off x="713232" y="3712464"/>
+            <a:ext cx="1828800" cy="237744"/>
+          </a:xfrm>
+          <a:prstGeom prst="rect">
+            <a:avLst/>
+          </a:prstGeom>
+          <a:noFill/>
+          <a:ln/>
+        </p:spPr>
+        <p:txBody>
+          <a:bodyPr wrap="square" lIns="0" tIns="0" rIns="0" bIns="0" rtlCol="0" anchor="ctr"/>
+          <a:lstStyle/>
+          <a:p>
+            <a:pPr indent="0" marL="0">
+              <a:buNone/>
+            </a:pPr>
+            <a:r>
+              <a:rPr lang="en-US" sz="900" b="1" spc="200" kern="0" dirty="0">
+                <a:solidFill>
+                  <a:srgbClr val="6D7A6F"/>
+                </a:solidFill>
+                <a:latin typeface="Malgun Gothic" pitchFamily="34" charset="0"/>
+                <a:ea typeface="Malgun Gothic" pitchFamily="34" charset="-122"/>
+                <a:cs typeface="Malgun Gothic" pitchFamily="34" charset="-120"/>
+              </a:rPr>
+              <a:t>냉동실</a:t>
+            </a:r>
+            <a:endParaRPr lang="en-US" sz="900" dirty="0"/>
+          </a:p>
+        </p:txBody>
+      </p:sp>
+      <p:sp>
+        <p:nvSpPr>
+          <p:cNvPr id="19" name="Shape 17"/>
+          <p:cNvSpPr/>
+          <p:nvPr/>
+        </p:nvSpPr>
+        <p:spPr>
+          <a:xfrm>
+            <a:off x="713232" y="3968496"/>
+            <a:ext cx="3246120" cy="603504"/>
+          </a:xfrm>
+          <a:prstGeom prst="roundRect">
+            <a:avLst>
+              <a:gd name="adj" fmla="val 9091"/>
+            </a:avLst>
+          </a:prstGeom>
+          <a:solidFill>
+            <a:srgbClr val="E7F9D7"/>
+          </a:solidFill>
+          <a:ln w="12700">
+            <a:solidFill>
+              <a:srgbClr val="E3ECDA"/>
+            </a:solidFill>
+            <a:prstDash val="solid"/>
+          </a:ln>
+        </p:spPr>
+      </p:sp>
+      <p:sp>
+        <p:nvSpPr>
+          <p:cNvPr id="20" name="Text 18"/>
+          <p:cNvSpPr/>
+          <p:nvPr/>
+        </p:nvSpPr>
+        <p:spPr>
+          <a:xfrm>
+            <a:off x="896112" y="3968496"/>
+            <a:ext cx="1828800" cy="603504"/>
+          </a:xfrm>
+          <a:prstGeom prst="rect">
+            <a:avLst/>
+          </a:prstGeom>
+          <a:noFill/>
+          <a:ln/>
+        </p:spPr>
+        <p:txBody>
+          <a:bodyPr wrap="square" lIns="0" tIns="0" rIns="0" bIns="0" rtlCol="0" anchor="ctr"/>
+          <a:lstStyle/>
+          <a:p>
+            <a:pPr indent="0" marL="0">
+              <a:buNone/>
+            </a:pPr>
+            <a:r>
+              <a:rPr lang="en-US" sz="1250" b="1" dirty="0">
+                <a:solidFill>
+                  <a:srgbClr val="17251C"/>
+                </a:solidFill>
+                <a:latin typeface="Malgun Gothic" pitchFamily="34" charset="0"/>
+                <a:ea typeface="Malgun Gothic" pitchFamily="34" charset="-122"/>
+                <a:cs typeface="Malgun Gothic" pitchFamily="34" charset="-120"/>
+              </a:rPr>
+              <a:t>냉동칸</a:t>
+            </a:r>
+            <a:endParaRPr lang="en-US" sz="1250" dirty="0"/>
+          </a:p>
+        </p:txBody>
+      </p:sp>
+      <p:sp>
+        <p:nvSpPr>
+          <p:cNvPr id="21" name="Shape 19"/>
+          <p:cNvSpPr/>
+          <p:nvPr/>
+        </p:nvSpPr>
+        <p:spPr>
+          <a:xfrm>
+            <a:off x="2103120" y="4443984"/>
+            <a:ext cx="502920" cy="45720"/>
+          </a:xfrm>
+          <a:prstGeom prst="roundRect">
+            <a:avLst>
+              <a:gd name="adj" fmla="val 60000"/>
+            </a:avLst>
+          </a:prstGeom>
+          <a:solidFill>
+            <a:srgbClr val="6D7A6F"/>
+          </a:solidFill>
+          <a:ln/>
+        </p:spPr>
+      </p:sp>
+      <p:sp>
+        <p:nvSpPr>
+          <p:cNvPr id="22" name="Text 20"/>
           <p:cNvSpPr/>
           <p:nvPr/>
         </p:nvSpPr>
@@ -5578,7 +5747,7 @@
       </p:sp>
       <p:sp>
         <p:nvSpPr>
-          <p:cNvPr id="17" name="Text 15"/>
+          <p:cNvPr id="23" name="Text 21"/>
           <p:cNvSpPr/>
           <p:nvPr/>
         </p:nvSpPr>
@@ -5617,7 +5786,7 @@
       </p:sp>
       <p:sp>
         <p:nvSpPr>
-          <p:cNvPr id="18" name="Text 16"/>
+          <p:cNvPr id="24" name="Text 22"/>
           <p:cNvSpPr/>
           <p:nvPr/>
         </p:nvSpPr>
@@ -5690,7 +5859,7 @@
       </p:sp>
       <p:sp>
         <p:nvSpPr>
-          <p:cNvPr id="19" name="Text 17"/>
+          <p:cNvPr id="25" name="Text 23"/>
           <p:cNvSpPr/>
           <p:nvPr/>
         </p:nvSpPr>

--- a/docs/이거먼저-발표.pptx
+++ b/docs/이거먼저-발표.pptx
@@ -1040,7 +1040,7 @@
           <a:p>
             <a:r>
               <a:rPr lang="en-US" dirty="0"/>
-              <a:t>첫 번째 특장점. 유통기한을 몰라도 됩니다. 구매일은 자동으로 오늘이 들어가고, 보관기간은 식약처 소비기한 참고치 기반 기본값이 자동 적용됩니다. 사용자가 입력할 날짜는 0개입니다. 기존 앱 이탈의 주범이던 기한 타이핑 자체를 없앴습니다.</a:t>
+              <a:t>첫 번째 특장점. 유통기한을 몰라도 됩니다. 구매일은 자동으로 오늘이 들어가고, 보관기간은 식약처 소비기한 참고치 기반 기본값이 자동 적용됩니다. 게다가 넣을 칸까지 품목에 따라 자동으로 추천됩니다 — 애호박이면 야채칸, 우유면 냉장칸처럼요. 그래서 사용자가 입력할 날짜는 0개, 이름만 치면 끝나는 '3초 등록'입니다. 기존 앱 이탈의 주범이던 기한 타이핑 자체를 없앴습니다.</a:t>
             </a:r>
             <a:endParaRPr lang="en-US" dirty="0"/>
           </a:p>
@@ -4447,7 +4447,7 @@
                 <a:ea typeface="Malgun Gothic" pitchFamily="34" charset="-122"/>
                 <a:cs typeface="Malgun Gothic" pitchFamily="34" charset="-120"/>
               </a:rPr>
-              <a:t>구매일은 자동으로 '오늘',</a:t>
+              <a:t>구매일은 '오늘', 보관기간과 넣을 칸까지</a:t>
             </a:r>
             <a:endParaRPr lang="en-US" sz="1450" dirty="0"/>
           </a:p>
@@ -4464,7 +4464,7 @@
                 <a:ea typeface="Malgun Gothic" pitchFamily="34" charset="-122"/>
                 <a:cs typeface="Malgun Gothic" pitchFamily="34" charset="-120"/>
               </a:rPr>
-              <a:t>보관기간은 식약처 소비기한 참고치로</a:t>
+              <a:t>품목에 따라 자동으로 채워집니다.</a:t>
             </a:r>
             <a:endParaRPr lang="en-US" sz="1450" dirty="0"/>
           </a:p>
@@ -4481,7 +4481,7 @@
                 <a:ea typeface="Malgun Gothic" pitchFamily="34" charset="-122"/>
                 <a:cs typeface="Malgun Gothic" pitchFamily="34" charset="-120"/>
               </a:rPr>
-              <a:t>자동 적용됩니다.</a:t>
+              <a:t>(식약처 소비기한 참고치 기반)</a:t>
             </a:r>
             <a:endParaRPr lang="en-US" sz="1450" dirty="0"/>
           </a:p>
@@ -4576,7 +4576,7 @@
                 <a:ea typeface="Malgun Gothic" pitchFamily="34" charset="-122"/>
                 <a:cs typeface="Malgun Gothic" pitchFamily="34" charset="-120"/>
               </a:rPr>
-              <a:t>기존 앱 이탈의 주범이던 '기한 타이핑'을 제거</a:t>
+              <a:t>이름만 치면 기한도, 넣을 칸도 알아서 — '3초 등록'</a:t>
             </a:r>
             <a:endParaRPr lang="en-US" sz="1200" dirty="0"/>
           </a:p>
@@ -4764,7 +4764,7 @@
                 <a:ea typeface="Malgun Gothic" pitchFamily="34" charset="-122"/>
                 <a:cs typeface="Malgun Gothic" pitchFamily="34" charset="-120"/>
               </a:rPr>
-              <a:t>권장 냉장 7일 · 자동 적용</a:t>
+              <a:t>권장 7일 · 야채칸 추천</a:t>
             </a:r>
             <a:endParaRPr lang="en-US" sz="1150" dirty="0"/>
           </a:p>
@@ -4778,7 +4778,7 @@
         </p:nvSpPr>
         <p:spPr>
           <a:xfrm>
-            <a:off x="5303520" y="2651760"/>
+            <a:off x="5303520" y="2670048"/>
             <a:ext cx="950976" cy="384048"/>
           </a:xfrm>
           <a:prstGeom prst="roundRect">
@@ -4800,7 +4800,7 @@
         </p:nvSpPr>
         <p:spPr>
           <a:xfrm>
-            <a:off x="5303520" y="2651760"/>
+            <a:off x="5303520" y="2670048"/>
             <a:ext cx="950976" cy="384048"/>
           </a:xfrm>
           <a:prstGeom prst="rect">
@@ -4839,7 +4839,7 @@
         </p:nvSpPr>
         <p:spPr>
           <a:xfrm>
-            <a:off x="6336792" y="2651760"/>
+            <a:off x="6336792" y="2670048"/>
             <a:ext cx="950976" cy="384048"/>
           </a:xfrm>
           <a:prstGeom prst="roundRect">
@@ -4861,7 +4861,7 @@
         </p:nvSpPr>
         <p:spPr>
           <a:xfrm>
-            <a:off x="6336792" y="2651760"/>
+            <a:off x="6336792" y="2670048"/>
             <a:ext cx="950976" cy="384048"/>
           </a:xfrm>
           <a:prstGeom prst="rect">
@@ -4900,7 +4900,7 @@
         </p:nvSpPr>
         <p:spPr>
           <a:xfrm>
-            <a:off x="7370064" y="2651760"/>
+            <a:off x="7370064" y="2670048"/>
             <a:ext cx="950976" cy="384048"/>
           </a:xfrm>
           <a:prstGeom prst="roundRect">
@@ -4922,7 +4922,7 @@
         </p:nvSpPr>
         <p:spPr>
           <a:xfrm>
-            <a:off x="7370064" y="2651760"/>
+            <a:off x="7370064" y="2670048"/>
             <a:ext cx="950976" cy="384048"/>
           </a:xfrm>
           <a:prstGeom prst="rect">
@@ -4955,13 +4955,74 @@
       </p:sp>
       <p:sp>
         <p:nvSpPr>
-          <p:cNvPr id="19" name="Text 17"/>
-          <p:cNvSpPr/>
-          <p:nvPr/>
-        </p:nvSpPr>
-        <p:spPr>
-          <a:xfrm>
-            <a:off x="5303520" y="3200400"/>
+          <p:cNvPr id="19" name="Shape 17"/>
+          <p:cNvSpPr/>
+          <p:nvPr/>
+        </p:nvSpPr>
+        <p:spPr>
+          <a:xfrm>
+            <a:off x="6528816" y="2414016"/>
+            <a:ext cx="566928" cy="219456"/>
+          </a:xfrm>
+          <a:prstGeom prst="roundRect">
+            <a:avLst>
+              <a:gd name="adj" fmla="val 50000"/>
+            </a:avLst>
+          </a:prstGeom>
+          <a:solidFill>
+            <a:srgbClr val="EF4A25"/>
+          </a:solidFill>
+          <a:ln/>
+        </p:spPr>
+      </p:sp>
+      <p:sp>
+        <p:nvSpPr>
+          <p:cNvPr id="20" name="Text 18"/>
+          <p:cNvSpPr/>
+          <p:nvPr/>
+        </p:nvSpPr>
+        <p:spPr>
+          <a:xfrm>
+            <a:off x="6528816" y="2414016"/>
+            <a:ext cx="566928" cy="219456"/>
+          </a:xfrm>
+          <a:prstGeom prst="rect">
+            <a:avLst/>
+          </a:prstGeom>
+          <a:noFill/>
+          <a:ln/>
+        </p:spPr>
+        <p:txBody>
+          <a:bodyPr wrap="square" lIns="0" tIns="0" rIns="0" bIns="0" rtlCol="0" anchor="ctr"/>
+          <a:lstStyle/>
+          <a:p>
+            <a:pPr algn="ctr" indent="0" marL="0">
+              <a:buNone/>
+            </a:pPr>
+            <a:r>
+              <a:rPr lang="en-US" sz="850" b="1" dirty="0">
+                <a:solidFill>
+                  <a:srgbClr val="FFFFFF"/>
+                </a:solidFill>
+                <a:latin typeface="Malgun Gothic" pitchFamily="34" charset="0"/>
+                <a:ea typeface="Malgun Gothic" pitchFamily="34" charset="-122"/>
+                <a:cs typeface="Malgun Gothic" pitchFamily="34" charset="-120"/>
+              </a:rPr>
+              <a:t>추천</a:t>
+            </a:r>
+            <a:endParaRPr lang="en-US" sz="850" dirty="0"/>
+          </a:p>
+        </p:txBody>
+      </p:sp>
+      <p:sp>
+        <p:nvSpPr>
+          <p:cNvPr id="21" name="Text 19"/>
+          <p:cNvSpPr/>
+          <p:nvPr/>
+        </p:nvSpPr>
+        <p:spPr>
+          <a:xfrm>
+            <a:off x="5303520" y="3218688"/>
             <a:ext cx="3017520" cy="320040"/>
           </a:xfrm>
           <a:prstGeom prst="rect">
@@ -4994,7 +5055,7 @@
       </p:sp>
       <p:sp>
         <p:nvSpPr>
-          <p:cNvPr id="20" name="Shape 18"/>
+          <p:cNvPr id="22" name="Shape 20"/>
           <p:cNvSpPr/>
           <p:nvPr/>
         </p:nvSpPr>
@@ -5016,7 +5077,7 @@
       </p:sp>
       <p:sp>
         <p:nvSpPr>
-          <p:cNvPr id="21" name="Text 19"/>
+          <p:cNvPr id="23" name="Text 21"/>
           <p:cNvSpPr/>
           <p:nvPr/>
         </p:nvSpPr>
